--- a/apresentacao/ciclo2-planejamento.pptx
+++ b/apresentacao/ciclo2-planejamento.pptx
@@ -16,9 +16,10 @@
     <p:sldId id="264" r:id="rId10"/>
     <p:sldId id="265" r:id="rId11"/>
     <p:sldId id="266" r:id="rId12"/>
+    <p:sldId id="267" r:id="rId13"/>
   </p:sldIdLst>
   <p:notesMasterIdLst>
-    <p:notesMasterId r:id="rId13"/>
+    <p:notesMasterId r:id="rId14"/>
   </p:notesMasterIdLst>
   <p:sldSz cx="12192000" cy="6858000"/>
   <p:notesSz cx="6858000" cy="12192000"/>
@@ -117,59 +118,64 @@
   <p:extLst>
     <p:ext uri="{521415D9-36F7-43E2-AB2F-B90AF26B5E84}">
       <p14:sectionLst xmlns:p14="http://schemas.microsoft.com/office/powerpoint/2010/main">
-        <p14:section name="Abertura" id="{ed2bf47a-c284-f64c-6596-c9328faf7dcc}">
+        <p14:section name="Abertura" id="{75a7c197-60b4-1ab2-f7bc-8b4e025cfc13}">
           <p14:sldIdLst>
             <p14:sldId id="256"/>
           </p14:sldIdLst>
         </p14:section>
-        <p14:section name="O problema" id="{e196778b-1304-7de5-ee75-42ea86e144dc}">
+        <p14:section name="O problema" id="{a46298b7-78f8-cc6b-b28f-637bcf2b52f4}">
           <p14:sldIdLst>
             <p14:sldId id="257"/>
           </p14:sldIdLst>
         </p14:section>
-        <p14:section name="Justificativa" id="{5cf5a968-ec7e-fc63-63cc-f2769c8fe3f6}">
+        <p14:section name="Justificativa" id="{f709980b-d05c-1ef2-faae-c3bf9df6d63f}">
           <p14:sldIdLst>
             <p14:sldId id="258"/>
           </p14:sldIdLst>
         </p14:section>
-        <p14:section name="Literatura" id="{c340b921-1a0a-ac19-1485-b4603f9b7764}">
+        <p14:section name="Literatura" id="{d9964c74-f73c-6521-00b1-98e4168f151f}">
           <p14:sldIdLst>
             <p14:sldId id="259"/>
           </p14:sldIdLst>
         </p14:section>
-        <p14:section name="O problema computacional" id="{bae7ee85-5ff8-8ec0-d6cb-b874a0af5bbb}">
+        <p14:section name="O problema computacional" id="{a08b31b1-fd43-eeba-6dd3-59fd03248896}">
           <p14:sldIdLst>
             <p14:sldId id="260"/>
           </p14:sldIdLst>
         </p14:section>
-        <p14:section name="Hipótese" id="{20204592-9fdf-2a77-b6b4-ca049691de77}">
+        <p14:section name="Hipótese" id="{7cb89358-e393-821e-d90a-297b34944004}">
           <p14:sldIdLst>
             <p14:sldId id="261"/>
           </p14:sldIdLst>
         </p14:section>
-        <p14:section name="Proposta" id="{2b37e92e-dda8-23c2-23f9-58faaea9af36}">
+        <p14:section name="Objetivos" id="{5be1a183-f67c-70c1-8e1c-04bc06d6f3e6}">
           <p14:sldIdLst>
             <p14:sldId id="262"/>
           </p14:sldIdLst>
         </p14:section>
-        <p14:section name="Metodologia" id="{5b8cd19d-8243-77ff-2265-d9c85d7aa6a5}">
+        <p14:section name="Proposta" id="{5868e591-5523-c6f5-cc49-43077e224a29}">
           <p14:sldIdLst>
             <p14:sldId id="263"/>
           </p14:sldIdLst>
         </p14:section>
-        <p14:section name="Entrega" id="{c3258266-f43f-1e6e-5f22-7b3dd045b2d3}">
+        <p14:section name="Metodologia" id="{783a0499-05ba-4c66-90a7-db5cb4d39f65}">
           <p14:sldIdLst>
             <p14:sldId id="264"/>
           </p14:sldIdLst>
         </p14:section>
-        <p14:section name="Achados" id="{0a53b75d-54d6-49b5-c94b-8e1bbd7f6a6f}">
+        <p14:section name="Entrega" id="{15dd60d7-7211-f1cb-6c72-7c4d1416e6cd}">
           <p14:sldIdLst>
             <p14:sldId id="265"/>
           </p14:sldIdLst>
         </p14:section>
-        <p14:section name="Fecho" id="{a186175c-656c-1401-ab18-bfc1eb56b3bc}">
+        <p14:section name="Achados" id="{88b82e63-8890-0ccb-fec2-7fb54850ead9}">
           <p14:sldIdLst>
             <p14:sldId id="266"/>
+          </p14:sldIdLst>
+        </p14:section>
+        <p14:section name="Fecho" id="{d9809487-c0b0-61b5-2958-8142f039236a}">
+          <p14:sldIdLst>
+            <p14:sldId id="267"/>
           </p14:sldIdLst>
         </p14:section>
       </p14:sectionLst>
@@ -664,7 +670,7 @@
           <a:p>
             <a:r>
               <a:rPr lang="en-US" dirty="0"/>
-              <a:t>Este slide fecha o circulo com o slide 6. Dissemos que a hipotese podia estar errada de dois jeitos, e um deles aconteceu. Abrir isso e mais forte do que esconder: mostra que o desenho experimental funcionou. Nao entre em numero de instancia aqui; se perguntarem, foram 40 microareas sorteadas.</a:t>
+              <a:t>Apresente as lacunas como lacunas conhecidas, nao como promessas. A mais visivel frente ao enunciado e prioridade e intervalo na selecao do turno. Se perguntarem sobre dados de pacientes: todos ficticios, so as coordenadas sao reais, para dar ordem de grandeza a matriz.</a:t>
             </a:r>
             <a:endParaRPr lang="en-US" dirty="0"/>
           </a:p>
@@ -752,7 +758,7 @@
           <a:p>
             <a:r>
               <a:rPr lang="en-US" dirty="0"/>
-              <a:t>Fecho. O trunfo do trabalho nao e ter usado Planning. E termos medido COMO ele ajuda neste problema, inclusive descobrindo que a resposta nao era a que esperavamos. Se a banca perguntar o que sobrou: declaratividade com efeito medido, e prova de inviabilidade. Se perguntar o que caiu: economia de tempo e exclusividade de capacidade.</a:t>
+              <a:t>Este slide fecha o circulo com o slide 6. Dissemos que a hipotese podia estar errada de dois jeitos, e um deles aconteceu. Abrir isso e mais forte do que esconder: mostra que o desenho experimental funcionou. Nao entre em numero de instancia aqui; se perguntarem, foram 40 microareas sorteadas.</a:t>
             </a:r>
             <a:endParaRPr lang="en-US" dirty="0"/>
           </a:p>
@@ -776,6 +782,94 @@
             <a:fld id="{F7021451-1387-4CA6-816F-3879F97B5CBC}" type="slidenum">
               <a:rPr lang="en-US"/>
               <a:t>11</a:t>
+            </a:fld>
+            <a:endParaRPr lang="en-US"/>
+          </a:p>
+        </p:txBody>
+      </p:sp>
+    </p:spTree>
+    <p:extLst>
+      <p:ext uri="{BB962C8B-B14F-4D97-AF65-F5344CB8AC3E}">
+        <p14:creationId xmlns:p14="http://schemas.microsoft.com/office/powerpoint/2010/main" val="1024086991"/>
+      </p:ext>
+    </p:extLst>
+  </p:cSld>
+  <p:clrMapOvr>
+    <a:masterClrMapping/>
+  </p:clrMapOvr>
+</p:notes>
+</file>
+
+<file path=ppt/notesSlides/notesSlide12.xml><?xml version="1.0" encoding="utf-8"?>
+<p:notes xmlns:a="http://schemas.openxmlformats.org/drawingml/2006/main" xmlns:r="http://schemas.openxmlformats.org/officeDocument/2006/relationships" xmlns:p="http://schemas.openxmlformats.org/presentationml/2006/main">
+  <p:cSld>
+    <p:spTree>
+      <p:nvGrpSpPr>
+        <p:cNvPr id="1" name=""/>
+        <p:cNvGrpSpPr/>
+        <p:nvPr/>
+      </p:nvGrpSpPr>
+      <p:grpSpPr>
+        <a:xfrm>
+          <a:off x="0" y="0"/>
+          <a:ext cx="0" cy="0"/>
+          <a:chOff x="0" y="0"/>
+          <a:chExt cx="0" cy="0"/>
+        </a:xfrm>
+      </p:grpSpPr>
+      <p:sp>
+        <p:nvSpPr>
+          <p:cNvPr id="2" name="Slide Image Placeholder 1"/>
+          <p:cNvSpPr>
+            <a:spLocks noGrp="1" noRot="1" noChangeAspect="1"/>
+          </p:cNvSpPr>
+          <p:nvPr>
+            <p:ph type="sldImg"/>
+          </p:nvPr>
+        </p:nvSpPr>
+        <p:spPr/>
+      </p:sp>
+      <p:sp>
+        <p:nvSpPr>
+          <p:cNvPr id="3" name="Notes Placeholder 2"/>
+          <p:cNvSpPr>
+            <a:spLocks noGrp="1"/>
+          </p:cNvSpPr>
+          <p:nvPr>
+            <p:ph type="body" idx="1"/>
+          </p:nvPr>
+        </p:nvSpPr>
+        <p:spPr/>
+        <p:txBody>
+          <a:bodyPr/>
+          <a:lstStyle/>
+          <a:p>
+            <a:r>
+              <a:rPr lang="en-US" dirty="0"/>
+              <a:t>A caixa tem a MESMA forma da do slide 6, e cor diferente de proposito: la a hipotese estava em aberto, aqui e a que sobreviveu. Se quiser, aponte isso. Os dois cartoes sao o que torna a nova hipotese uma hipotese e nao um lema: ela e falsificavel nas duas direcoes, e cada direcao ja tem medicao. Se perguntarem o que caiu: economia de deslocamento e a ideia de que o planejamento acha planos que um programa corrigido nao acharia.</a:t>
+            </a:r>
+            <a:endParaRPr lang="en-US" dirty="0"/>
+          </a:p>
+        </p:txBody>
+      </p:sp>
+      <p:sp>
+        <p:nvSpPr>
+          <p:cNvPr id="4" name="Slide Number Placeholder 3"/>
+          <p:cNvSpPr>
+            <a:spLocks noGrp="1"/>
+          </p:cNvSpPr>
+          <p:nvPr>
+            <p:ph type="sldNum" sz="quarter" idx="10"/>
+          </p:nvPr>
+        </p:nvSpPr>
+        <p:spPr/>
+        <p:txBody>
+          <a:bodyPr/>
+          <a:lstStyle/>
+          <a:p>
+            <a:fld id="{F7021451-1387-4CA6-816F-3879F97B5CBC}" type="slidenum">
+              <a:rPr lang="en-US"/>
+              <a:t>12</a:t>
             </a:fld>
             <a:endParaRPr lang="en-US"/>
           </a:p>
@@ -1280,7 +1374,7 @@
           <a:p>
             <a:r>
               <a:rPr lang="en-US" dirty="0"/>
-              <a:t>Explique POR QUE sobra decisao para o planejador, senao a plateia conclui que ele e decorativo. A camada geometrica entrega a ordem congelada e o custo de desvio. O que sobra para o planejador: o que fazer em cada casa, quando acionar a supervisao, e em qual parada vale a pena sair da rota para repor. Se perguntarem por que nao OR-Tools: ele resolve a metade geometrica e nao a normativa.</a:t>
+              <a:t>Este slide responde a secao 4 do guia. Nao leia os tres cartoes: diga que os sete objetivos especificos se agrupam em formalizar a norma, construir o sistema e validar com medicao, e que a verificacao em planejador de referencia e objetivo declarado, nao detalhe. Se perguntarem quantos sao, sao sete, e estao listados no documento.</a:t>
             </a:r>
             <a:endParaRPr lang="en-US" dirty="0"/>
           </a:p>
@@ -1368,7 +1462,7 @@
           <a:p>
             <a:r>
               <a:rPr lang="en-US" dirty="0"/>
-              <a:t>Detalhe metodologico que vale citar: o executor le os custos do proprio .pddl, para eliminar divergencia de medicao entre os dois grupos. Isso pegou um erro real durante o desenvolvimento, em que a mesma acao era cobrada de formas diferentes nos dois lados.</a:t>
+              <a:t>Explique POR QUE sobra decisao para o planejador, senao a plateia conclui que ele e decorativo. A camada geometrica entrega a ordem congelada e o custo de desvio. O que sobra para o planejador: o que fazer em cada casa, quando acionar a supervisao, e em qual parada vale a pena sair da rota para repor. Se perguntarem por que nao OR-Tools: ele resolve a metade geometrica e nao a normativa.</a:t>
             </a:r>
             <a:endParaRPr lang="en-US" dirty="0"/>
           </a:p>
@@ -1456,7 +1550,7 @@
           <a:p>
             <a:r>
               <a:rPr lang="en-US" dirty="0"/>
-              <a:t>Apresente as lacunas como lacunas conhecidas, nao como promessas. A mais visivel frente ao enunciado e prioridade e intervalo na selecao do turno. Se perguntarem sobre dados de pacientes: todos ficticios, so as coordenadas sao reais, para dar ordem de grandeza a matriz.</a:t>
+              <a:t>Detalhe metodologico que vale citar: o executor le os custos do proprio .pddl, para eliminar divergencia de medicao entre os dois grupos. Isso pegou um erro real durante o desenvolvimento, em que a mesma acao era cobrada de formas diferentes nos dois lados.</a:t>
             </a:r>
             <a:endParaRPr lang="en-US" dirty="0"/>
           </a:p>
@@ -2348,7 +2442,7 @@
                   <a:srgbClr val="B35C38"/>
                 </a:solidFill>
               </a:rPr>
-              <a:t>IMPLEMENTAÇÃO EXPLORATÓRIA</a:t>
+              <a:t>RESULTADOS ESPERADOS E CRONOGRAMA</a:t>
             </a:r>
             <a:endParaRPr lang="en-US" sz="1100" dirty="0"/>
           </a:p>
@@ -2390,7 +2484,7 @@
                 <a:ea typeface="Cambria" pitchFamily="34" charset="-122"/>
                 <a:cs typeface="Cambria" pitchFamily="34" charset="-120"/>
               </a:rPr>
-              <a:t>Três coisas que já aprendemos, uma delas contra nós</a:t>
+              <a:t>O que será entregue, e até quando</a:t>
             </a:r>
             <a:endParaRPr lang="en-US" sz="3400" dirty="0"/>
           </a:p>
@@ -2398,18 +2492,18 @@
       </p:sp>
       <p:sp>
         <p:nvSpPr>
-          <p:cNvPr id="4" name="achado0"/>
+          <p:cNvPr id="4" name="entrega"/>
           <p:cNvSpPr/>
           <p:nvPr/>
         </p:nvSpPr>
         <p:spPr>
           <a:xfrm>
-            <a:off x="685800" y="1810512"/>
-            <a:ext cx="3448202" cy="2286000"/>
+            <a:off x="685800" y="1783080"/>
+            <a:ext cx="4754880" cy="3108960"/>
           </a:xfrm>
           <a:prstGeom prst="roundRect">
             <a:avLst>
-              <a:gd name="adj" fmla="val 4000"/>
+              <a:gd name="adj" fmla="val 2941"/>
             </a:avLst>
           </a:prstGeom>
           <a:solidFill>
@@ -2438,8 +2532,8 @@
         </p:nvSpPr>
         <p:spPr>
           <a:xfrm>
-            <a:off x="923544" y="2011680"/>
-            <a:ext cx="2972714" cy="274320"/>
+            <a:off x="923544" y="1984248"/>
+            <a:ext cx="4279392" cy="274320"/>
           </a:xfrm>
           <a:prstGeom prst="rect">
             <a:avLst/>
@@ -2460,7 +2554,7 @@
                   <a:srgbClr val="4A6B5B"/>
                 </a:solidFill>
               </a:rPr>
-              <a:t>A FAVOR</a:t>
+              <a:t>NÍVEL DE MATURIDADE TRL 3 A 4</a:t>
             </a:r>
             <a:endParaRPr lang="en-US" sz="1250" dirty="0"/>
           </a:p>
@@ -2474,8 +2568,8 @@
         </p:nvSpPr>
         <p:spPr>
           <a:xfrm>
-            <a:off x="923544" y="2340864"/>
-            <a:ext cx="2972714" cy="603504"/>
+            <a:off x="923544" y="2313432"/>
+            <a:ext cx="4279392" cy="384048"/>
           </a:xfrm>
           <a:prstGeom prst="rect">
             <a:avLst/>
@@ -2494,7 +2588,7 @@
               <a:buNone/>
             </a:pPr>
             <a:r>
-              <a:rPr lang="en-US" sz="1600" b="1" dirty="0">
+              <a:rPr lang="en-US" sz="1700" b="1" dirty="0">
                 <a:solidFill>
                   <a:srgbClr val="33291F"/>
                 </a:solidFill>
@@ -2502,9 +2596,9 @@
                 <a:ea typeface="Cambria" pitchFamily="34" charset="-122"/>
                 <a:cs typeface="Cambria" pitchFamily="34" charset="-120"/>
               </a:rPr>
-              <a:t>A busca trivial não escala</a:t>
-            </a:r>
-            <a:endParaRPr lang="en-US" sz="1600" dirty="0"/>
+              <a:t>Sistema validado em laboratório</a:t>
+            </a:r>
+            <a:endParaRPr lang="en-US" sz="1700" dirty="0"/>
           </a:p>
         </p:txBody>
       </p:sp>
@@ -2516,8 +2610,8 @@
         </p:nvSpPr>
         <p:spPr>
           <a:xfrm>
-            <a:off x="923544" y="3017520"/>
-            <a:ext cx="2972714" cy="914400"/>
+            <a:off x="923544" y="2770632"/>
+            <a:ext cx="4279392" cy="1956816"/>
           </a:xfrm>
           <a:prstGeom prst="rect">
             <a:avLst/>
@@ -2531,7 +2625,7 @@
           <a:p>
             <a:pPr indent="0" marL="0">
               <a:lnSpc>
-                <a:spcPts val="1650"/>
+                <a:spcPts val="1800"/>
               </a:lnSpc>
               <a:buNone/>
             </a:pPr>
@@ -2541,26 +2635,271 @@
                   <a:srgbClr val="5C4F41"/>
                 </a:solidFill>
               </a:rPr>
-              <a:t>Varrer o mesmo modelo declarativo sem heurística resolve até 5 ou 6 pacientes. Um turno real tem de 10 a 15.</a:t>
+              <a:t>Não é produto pronto para implantação em rede de saúde.</a:t>
             </a:r>
             <a:endParaRPr lang="en-US" sz="1300" dirty="0"/>
           </a:p>
-        </p:txBody>
-      </p:sp>
-      <p:sp>
-        <p:nvSpPr>
-          <p:cNvPr id="8" name="achado1"/>
+          <a:p>
+            <a:pPr indent="0" marL="0">
+              <a:lnSpc>
+                <a:spcPts val="1800"/>
+              </a:lnSpc>
+              <a:buNone/>
+            </a:pPr>
+            <a:endParaRPr lang="en-US" sz="1300" dirty="0"/>
+          </a:p>
+          <a:p>
+            <a:pPr indent="0" marL="0">
+              <a:lnSpc>
+                <a:spcPts val="1800"/>
+              </a:lnSpc>
+              <a:buNone/>
+            </a:pPr>
+            <a:r>
+              <a:rPr lang="en-US" sz="1300" dirty="0">
+                <a:solidFill>
+                  <a:srgbClr val="5C4F41"/>
+                </a:solidFill>
+              </a:rPr>
+              <a:t>·  o sistema com as camadas integradas</a:t>
+            </a:r>
+            <a:endParaRPr lang="en-US" sz="1300" dirty="0"/>
+          </a:p>
+          <a:p>
+            <a:pPr indent="0" marL="0">
+              <a:lnSpc>
+                <a:spcPts val="1800"/>
+              </a:lnSpc>
+              <a:buNone/>
+            </a:pPr>
+            <a:r>
+              <a:rPr lang="en-US" sz="1300" dirty="0">
+                <a:solidFill>
+                  <a:srgbClr val="5C4F41"/>
+                </a:solidFill>
+              </a:rPr>
+              <a:t>·  o domínio PDDL mapeado dispositivo a dispositivo</a:t>
+            </a:r>
+            <a:endParaRPr lang="en-US" sz="1300" dirty="0"/>
+          </a:p>
+          <a:p>
+            <a:pPr indent="0" marL="0">
+              <a:lnSpc>
+                <a:spcPts val="1800"/>
+              </a:lnSpc>
+              <a:buNone/>
+            </a:pPr>
+            <a:r>
+              <a:rPr lang="en-US" sz="1300" dirty="0">
+                <a:solidFill>
+                  <a:srgbClr val="5C4F41"/>
+                </a:solidFill>
+              </a:rPr>
+              <a:t>·  a saída legível pelo agente de saúde</a:t>
+            </a:r>
+            <a:endParaRPr lang="en-US" sz="1300" dirty="0"/>
+          </a:p>
+          <a:p>
+            <a:pPr indent="0" marL="0">
+              <a:lnSpc>
+                <a:spcPts val="1800"/>
+              </a:lnSpc>
+              <a:buNone/>
+            </a:pPr>
+            <a:r>
+              <a:rPr lang="en-US" sz="1300" dirty="0">
+                <a:solidFill>
+                  <a:srgbClr val="5C4F41"/>
+                </a:solidFill>
+              </a:rPr>
+              <a:t>·  os experimentos reprodutíveis</a:t>
+            </a:r>
+            <a:endParaRPr lang="en-US" sz="1300" dirty="0"/>
+          </a:p>
+          <a:p>
+            <a:pPr indent="0" marL="0">
+              <a:lnSpc>
+                <a:spcPts val="1800"/>
+              </a:lnSpc>
+              <a:buNone/>
+            </a:pPr>
+            <a:r>
+              <a:rPr lang="en-US" sz="1300" dirty="0">
+                <a:solidFill>
+                  <a:srgbClr val="5C4F41"/>
+                </a:solidFill>
+              </a:rPr>
+              <a:t>·  o relatório técnico das medições</a:t>
+            </a:r>
+            <a:endParaRPr lang="en-US" sz="1300" dirty="0"/>
+          </a:p>
+        </p:txBody>
+      </p:sp>
+      <p:sp>
+        <p:nvSpPr>
+          <p:cNvPr id="8" name="marco0"/>
           <p:cNvSpPr/>
           <p:nvPr/>
         </p:nvSpPr>
         <p:spPr>
           <a:xfrm>
-            <a:off x="4371746" y="1810512"/>
-            <a:ext cx="3448202" cy="2286000"/>
+            <a:off x="5678424" y="1783080"/>
+            <a:ext cx="5827471" cy="969264"/>
           </a:xfrm>
           <a:prstGeom prst="roundRect">
             <a:avLst>
-              <a:gd name="adj" fmla="val 4000"/>
+              <a:gd name="adj" fmla="val 7547"/>
+            </a:avLst>
+          </a:prstGeom>
+          <a:solidFill>
+            <a:srgbClr val="DDE7E0"/>
+          </a:solidFill>
+          <a:ln w="9525">
+            <a:solidFill>
+              <a:srgbClr val="E6DCCB"/>
+            </a:solidFill>
+            <a:prstDash val="solid"/>
+          </a:ln>
+          <a:effectLst>
+            <a:outerShdw sx="100000" sy="100000" kx="0" ky="0" algn="bl" rotWithShape="0" blurRad="127000" dist="25400" dir="5400000">
+              <a:srgbClr val="33291F">
+                <a:alpha val="10000"/>
+              </a:srgbClr>
+            </a:outerShdw>
+          </a:effectLst>
+        </p:spPr>
+      </p:sp>
+      <p:sp>
+        <p:nvSpPr>
+          <p:cNvPr id="9" name="Text 7"/>
+          <p:cNvSpPr txBox="1"/>
+          <p:nvPr/>
+        </p:nvSpPr>
+        <p:spPr>
+          <a:xfrm>
+            <a:off x="5916168" y="1947672"/>
+            <a:ext cx="1143000" cy="292608"/>
+          </a:xfrm>
+          <a:prstGeom prst="rect">
+            <a:avLst/>
+          </a:prstGeom>
+          <a:noFill/>
+          <a:ln/>
+        </p:spPr>
+        <p:txBody>
+          <a:bodyPr wrap="square" lIns="0" tIns="0" rIns="0" bIns="0" rtlCol="0" anchor="ctr"/>
+          <a:lstStyle/>
+          <a:p>
+            <a:pPr indent="0" marL="0">
+              <a:buNone/>
+            </a:pPr>
+            <a:r>
+              <a:rPr lang="en-US" sz="1450" b="1" dirty="0">
+                <a:solidFill>
+                  <a:srgbClr val="4A6B5B"/>
+                </a:solidFill>
+                <a:latin typeface="Cambria" pitchFamily="34" charset="0"/>
+                <a:ea typeface="Cambria" pitchFamily="34" charset="-122"/>
+                <a:cs typeface="Cambria" pitchFamily="34" charset="-120"/>
+              </a:rPr>
+              <a:t>25 / 09</a:t>
+            </a:r>
+            <a:endParaRPr lang="en-US" sz="1450" dirty="0"/>
+          </a:p>
+        </p:txBody>
+      </p:sp>
+      <p:sp>
+        <p:nvSpPr>
+          <p:cNvPr id="10" name="Text 8"/>
+          <p:cNvSpPr txBox="1"/>
+          <p:nvPr/>
+        </p:nvSpPr>
+        <p:spPr>
+          <a:xfrm>
+            <a:off x="7132320" y="1929384"/>
+            <a:ext cx="4572000" cy="310896"/>
+          </a:xfrm>
+          <a:prstGeom prst="rect">
+            <a:avLst/>
+          </a:prstGeom>
+          <a:noFill/>
+          <a:ln/>
+        </p:spPr>
+        <p:txBody>
+          <a:bodyPr wrap="square" lIns="0" tIns="0" rIns="0" bIns="0" rtlCol="0" anchor="ctr"/>
+          <a:lstStyle/>
+          <a:p>
+            <a:pPr indent="0" marL="0">
+              <a:buNone/>
+            </a:pPr>
+            <a:r>
+              <a:rPr lang="en-US" sz="1450" b="1" dirty="0">
+                <a:solidFill>
+                  <a:srgbClr val="33291F"/>
+                </a:solidFill>
+                <a:latin typeface="Cambria" pitchFamily="34" charset="0"/>
+                <a:ea typeface="Cambria" pitchFamily="34" charset="-122"/>
+                <a:cs typeface="Cambria" pitchFamily="34" charset="-120"/>
+              </a:rPr>
+              <a:t>Concepção e verificação de viabilidade</a:t>
+            </a:r>
+            <a:endParaRPr lang="en-US" sz="1450" dirty="0"/>
+          </a:p>
+        </p:txBody>
+      </p:sp>
+      <p:sp>
+        <p:nvSpPr>
+          <p:cNvPr id="11" name="Text 9"/>
+          <p:cNvSpPr txBox="1"/>
+          <p:nvPr/>
+        </p:nvSpPr>
+        <p:spPr>
+          <a:xfrm>
+            <a:off x="7132320" y="2276856"/>
+            <a:ext cx="4572000" cy="402336"/>
+          </a:xfrm>
+          <a:prstGeom prst="rect">
+            <a:avLst/>
+          </a:prstGeom>
+          <a:noFill/>
+          <a:ln/>
+        </p:spPr>
+        <p:txBody>
+          <a:bodyPr wrap="square" lIns="0" tIns="0" rIns="0" bIns="0" rtlCol="0" anchor="ctr"/>
+          <a:lstStyle/>
+          <a:p>
+            <a:pPr indent="0" marL="0">
+              <a:lnSpc>
+                <a:spcPts val="1450"/>
+              </a:lnSpc>
+              <a:buNone/>
+            </a:pPr>
+            <a:r>
+              <a:rPr lang="en-US" sz="1200" dirty="0">
+                <a:solidFill>
+                  <a:srgbClr val="5C4F41"/>
+                </a:solidFill>
+              </a:rPr>
+              <a:t>Delimitação do problema, revisão bibliográfica e implementação exploratória.</a:t>
+            </a:r>
+            <a:endParaRPr lang="en-US" sz="1200" dirty="0"/>
+          </a:p>
+        </p:txBody>
+      </p:sp>
+      <p:sp>
+        <p:nvSpPr>
+          <p:cNvPr id="12" name="marco1"/>
+          <p:cNvSpPr/>
+          <p:nvPr/>
+        </p:nvSpPr>
+        <p:spPr>
+          <a:xfrm>
+            <a:off x="5678424" y="2852928"/>
+            <a:ext cx="5827471" cy="969264"/>
+          </a:xfrm>
+          <a:prstGeom prst="roundRect">
+            <a:avLst>
+              <a:gd name="adj" fmla="val 7547"/>
             </a:avLst>
           </a:prstGeom>
           <a:solidFill>
@@ -2583,14 +2922,14 @@
       </p:sp>
       <p:sp>
         <p:nvSpPr>
-          <p:cNvPr id="9" name="Text 7"/>
-          <p:cNvSpPr txBox="1"/>
-          <p:nvPr/>
-        </p:nvSpPr>
-        <p:spPr>
-          <a:xfrm>
-            <a:off x="4609490" y="2011680"/>
-            <a:ext cx="2972714" cy="274320"/>
+          <p:cNvPr id="13" name="Text 11"/>
+          <p:cNvSpPr txBox="1"/>
+          <p:nvPr/>
+        </p:nvSpPr>
+        <p:spPr>
+          <a:xfrm>
+            <a:off x="5916168" y="3017520"/>
+            <a:ext cx="1143000" cy="292608"/>
           </a:xfrm>
           <a:prstGeom prst="rect">
             <a:avLst/>
@@ -2606,116 +2945,116 @@
               <a:buNone/>
             </a:pPr>
             <a:r>
-              <a:rPr lang="en-US" sz="1250" b="1" spc="100" kern="0" dirty="0">
-                <a:solidFill>
-                  <a:srgbClr val="4A6B5B"/>
-                </a:solidFill>
-              </a:rPr>
-              <a:t>A FAVOR</a:t>
-            </a:r>
-            <a:endParaRPr lang="en-US" sz="1250" dirty="0"/>
-          </a:p>
-        </p:txBody>
-      </p:sp>
-      <p:sp>
-        <p:nvSpPr>
-          <p:cNvPr id="10" name="Text 8"/>
-          <p:cNvSpPr txBox="1"/>
-          <p:nvPr/>
-        </p:nvSpPr>
-        <p:spPr>
-          <a:xfrm>
-            <a:off x="4609490" y="2340864"/>
-            <a:ext cx="2972714" cy="603504"/>
-          </a:xfrm>
-          <a:prstGeom prst="rect">
-            <a:avLst/>
-          </a:prstGeom>
-          <a:noFill/>
-          <a:ln/>
-        </p:spPr>
-        <p:txBody>
-          <a:bodyPr wrap="square" lIns="0" tIns="0" rIns="0" bIns="0" rtlCol="0" anchor="ctr"/>
-          <a:lstStyle/>
-          <a:p>
-            <a:pPr indent="0" marL="0">
-              <a:lnSpc>
-                <a:spcPts val="2100"/>
-              </a:lnSpc>
-              <a:buNone/>
-            </a:pPr>
-            <a:r>
-              <a:rPr lang="en-US" sz="1600" b="1" dirty="0">
-                <a:solidFill>
-                  <a:srgbClr val="33291F"/>
+              <a:rPr lang="en-US" sz="1450" b="1" dirty="0">
+                <a:solidFill>
+                  <a:srgbClr val="B35C38"/>
                 </a:solidFill>
                 <a:latin typeface="Cambria" pitchFamily="34" charset="0"/>
                 <a:ea typeface="Cambria" pitchFamily="34" charset="-122"/>
                 <a:cs typeface="Cambria" pitchFamily="34" charset="-120"/>
               </a:rPr>
-              <a:t>O planejador está correto</a:t>
-            </a:r>
-            <a:endParaRPr lang="en-US" sz="1600" dirty="0"/>
-          </a:p>
-        </p:txBody>
-      </p:sp>
-      <p:sp>
-        <p:nvSpPr>
-          <p:cNvPr id="11" name="Text 9"/>
-          <p:cNvSpPr txBox="1"/>
-          <p:nvPr/>
-        </p:nvSpPr>
-        <p:spPr>
-          <a:xfrm>
-            <a:off x="4609490" y="3017520"/>
-            <a:ext cx="2972714" cy="914400"/>
-          </a:xfrm>
-          <a:prstGeom prst="rect">
-            <a:avLst/>
-          </a:prstGeom>
-          <a:noFill/>
-          <a:ln/>
-        </p:spPr>
-        <p:txBody>
-          <a:bodyPr wrap="square" lIns="0" tIns="0" rIns="0" bIns="0" rtlCol="0" anchor="t"/>
-          <a:lstStyle/>
-          <a:p>
-            <a:pPr indent="0" marL="0">
-              <a:lnSpc>
-                <a:spcPts val="1650"/>
-              </a:lnSpc>
-              <a:buNone/>
-            </a:pPr>
-            <a:r>
-              <a:rPr lang="en-US" sz="1300" dirty="0">
+              <a:t>02 / 10</a:t>
+            </a:r>
+            <a:endParaRPr lang="en-US" sz="1450" dirty="0"/>
+          </a:p>
+        </p:txBody>
+      </p:sp>
+      <p:sp>
+        <p:nvSpPr>
+          <p:cNvPr id="14" name="Text 12"/>
+          <p:cNvSpPr txBox="1"/>
+          <p:nvPr/>
+        </p:nvSpPr>
+        <p:spPr>
+          <a:xfrm>
+            <a:off x="7132320" y="2999232"/>
+            <a:ext cx="4572000" cy="310896"/>
+          </a:xfrm>
+          <a:prstGeom prst="rect">
+            <a:avLst/>
+          </a:prstGeom>
+          <a:noFill/>
+          <a:ln/>
+        </p:spPr>
+        <p:txBody>
+          <a:bodyPr wrap="square" lIns="0" tIns="0" rIns="0" bIns="0" rtlCol="0" anchor="ctr"/>
+          <a:lstStyle/>
+          <a:p>
+            <a:pPr indent="0" marL="0">
+              <a:buNone/>
+            </a:pPr>
+            <a:r>
+              <a:rPr lang="en-US" sz="1450" b="1" dirty="0">
+                <a:solidFill>
+                  <a:srgbClr val="33291F"/>
+                </a:solidFill>
+                <a:latin typeface="Cambria" pitchFamily="34" charset="0"/>
+                <a:ea typeface="Cambria" pitchFamily="34" charset="-122"/>
+                <a:cs typeface="Cambria" pitchFamily="34" charset="-120"/>
+              </a:rPr>
+              <a:t>Construção do sistema</a:t>
+            </a:r>
+            <a:endParaRPr lang="en-US" sz="1450" dirty="0"/>
+          </a:p>
+        </p:txBody>
+      </p:sp>
+      <p:sp>
+        <p:nvSpPr>
+          <p:cNvPr id="15" name="Text 13"/>
+          <p:cNvSpPr txBox="1"/>
+          <p:nvPr/>
+        </p:nvSpPr>
+        <p:spPr>
+          <a:xfrm>
+            <a:off x="7132320" y="3346704"/>
+            <a:ext cx="4572000" cy="402336"/>
+          </a:xfrm>
+          <a:prstGeom prst="rect">
+            <a:avLst/>
+          </a:prstGeom>
+          <a:noFill/>
+          <a:ln/>
+        </p:spPr>
+        <p:txBody>
+          <a:bodyPr wrap="square" lIns="0" tIns="0" rIns="0" bIns="0" rtlCol="0" anchor="ctr"/>
+          <a:lstStyle/>
+          <a:p>
+            <a:pPr indent="0" marL="0">
+              <a:lnSpc>
+                <a:spcPts val="1450"/>
+              </a:lnSpc>
+              <a:buNone/>
+            </a:pPr>
+            <a:r>
+              <a:rPr lang="en-US" sz="1200" dirty="0">
                 <a:solidFill>
                   <a:srgbClr val="5C4F41"/>
                 </a:solidFill>
               </a:rPr>
-              <a:t>Um planejador de referência independente concordou sobre viabilidade e plano mínimo em todas as instâncias testadas.</a:t>
-            </a:r>
-            <a:endParaRPr lang="en-US" sz="1300" dirty="0"/>
-          </a:p>
-        </p:txBody>
-      </p:sp>
-      <p:sp>
-        <p:nvSpPr>
-          <p:cNvPr id="12" name="achado2"/>
+              <a:t>Domínio completo, camada geométrica, política de seleção, saída operacional e experimentos.</a:t>
+            </a:r>
+            <a:endParaRPr lang="en-US" sz="1200" dirty="0"/>
+          </a:p>
+        </p:txBody>
+      </p:sp>
+      <p:sp>
+        <p:nvSpPr>
+          <p:cNvPr id="16" name="marco2"/>
           <p:cNvSpPr/>
           <p:nvPr/>
         </p:nvSpPr>
         <p:spPr>
           <a:xfrm>
-            <a:off x="8057693" y="1810512"/>
-            <a:ext cx="3448202" cy="2286000"/>
+            <a:off x="5678424" y="3922776"/>
+            <a:ext cx="5827471" cy="969264"/>
           </a:xfrm>
           <a:prstGeom prst="roundRect">
             <a:avLst>
-              <a:gd name="adj" fmla="val 4000"/>
+              <a:gd name="adj" fmla="val 7547"/>
             </a:avLst>
           </a:prstGeom>
           <a:solidFill>
-            <a:srgbClr val="F3DFD3"/>
+            <a:srgbClr val="FFFDF8"/>
           </a:solidFill>
           <a:ln w="9525">
             <a:solidFill>
@@ -2734,14 +3073,14 @@
       </p:sp>
       <p:sp>
         <p:nvSpPr>
-          <p:cNvPr id="13" name="Text 11"/>
-          <p:cNvSpPr txBox="1"/>
-          <p:nvPr/>
-        </p:nvSpPr>
-        <p:spPr>
-          <a:xfrm>
-            <a:off x="8295437" y="2011680"/>
-            <a:ext cx="2972714" cy="274320"/>
+          <p:cNvPr id="17" name="Text 15"/>
+          <p:cNvSpPr txBox="1"/>
+          <p:nvPr/>
+        </p:nvSpPr>
+        <p:spPr>
+          <a:xfrm>
+            <a:off x="5916168" y="4087368"/>
+            <a:ext cx="1143000" cy="292608"/>
           </a:xfrm>
           <a:prstGeom prst="rect">
             <a:avLst/>
@@ -2757,130 +3096,30 @@
               <a:buNone/>
             </a:pPr>
             <a:r>
-              <a:rPr lang="en-US" sz="1250" b="1" spc="100" kern="0" dirty="0">
+              <a:rPr lang="en-US" sz="1450" b="1" dirty="0">
                 <a:solidFill>
                   <a:srgbClr val="B35C38"/>
-                </a:solidFill>
-              </a:rPr>
-              <a:t>CONTRA A HIPÓTESE</a:t>
-            </a:r>
-            <a:endParaRPr lang="en-US" sz="1250" dirty="0"/>
-          </a:p>
-        </p:txBody>
-      </p:sp>
-      <p:sp>
-        <p:nvSpPr>
-          <p:cNvPr id="14" name="Text 12"/>
-          <p:cNvSpPr txBox="1"/>
-          <p:nvPr/>
-        </p:nvSpPr>
-        <p:spPr>
-          <a:xfrm>
-            <a:off x="8295437" y="2340864"/>
-            <a:ext cx="2972714" cy="603504"/>
-          </a:xfrm>
-          <a:prstGeom prst="rect">
-            <a:avLst/>
-          </a:prstGeom>
-          <a:noFill/>
-          <a:ln/>
-        </p:spPr>
-        <p:txBody>
-          <a:bodyPr wrap="square" lIns="0" tIns="0" rIns="0" bIns="0" rtlCol="0" anchor="ctr"/>
-          <a:lstStyle/>
-          <a:p>
-            <a:pPr indent="0" marL="0">
-              <a:lnSpc>
-                <a:spcPts val="2100"/>
-              </a:lnSpc>
-              <a:buNone/>
-            </a:pPr>
-            <a:r>
-              <a:rPr lang="en-US" sz="1600" b="1" dirty="0">
-                <a:solidFill>
-                  <a:srgbClr val="33291F"/>
                 </a:solidFill>
                 <a:latin typeface="Cambria" pitchFamily="34" charset="0"/>
                 <a:ea typeface="Cambria" pitchFamily="34" charset="-122"/>
                 <a:cs typeface="Cambria" pitchFamily="34" charset="-120"/>
               </a:rPr>
-              <a:t>A hipótese foi refutada</a:t>
-            </a:r>
-            <a:endParaRPr lang="en-US" sz="1600" dirty="0"/>
-          </a:p>
-        </p:txBody>
-      </p:sp>
-      <p:sp>
-        <p:nvSpPr>
-          <p:cNvPr id="15" name="Text 13"/>
-          <p:cNvSpPr txBox="1"/>
-          <p:nvPr/>
-        </p:nvSpPr>
-        <p:spPr>
-          <a:xfrm>
-            <a:off x="8295437" y="3017520"/>
-            <a:ext cx="2972714" cy="914400"/>
-          </a:xfrm>
-          <a:prstGeom prst="rect">
-            <a:avLst/>
-          </a:prstGeom>
-          <a:noFill/>
-          <a:ln/>
-        </p:spPr>
-        <p:txBody>
-          <a:bodyPr wrap="square" lIns="0" tIns="0" rIns="0" bIns="0" rtlCol="0" anchor="t"/>
-          <a:lstStyle/>
-          <a:p>
-            <a:pPr indent="0" marL="0">
-              <a:lnSpc>
-                <a:spcPts val="1650"/>
-              </a:lnSpc>
-              <a:buNone/>
-            </a:pPr>
-            <a:r>
-              <a:rPr lang="en-US" sz="1300" dirty="0">
-                <a:solidFill>
-                  <a:srgbClr val="5C4F41"/>
-                </a:solidFill>
-              </a:rPr>
-              <a:t>Uma correção manual no executor procedural zera os falsos negativos. Ele não era incapaz: faltava-lhe a regra.</a:t>
-            </a:r>
-            <a:endParaRPr lang="en-US" sz="1300" dirty="0"/>
-          </a:p>
-        </p:txBody>
-      </p:sp>
-      <p:sp>
-        <p:nvSpPr>
-          <p:cNvPr id="16" name="fecho"/>
-          <p:cNvSpPr/>
-          <p:nvPr/>
-        </p:nvSpPr>
-        <p:spPr>
-          <a:xfrm>
-            <a:off x="685800" y="4407408"/>
-            <a:ext cx="10820095" cy="713232"/>
-          </a:xfrm>
-          <a:prstGeom prst="roundRect">
-            <a:avLst>
-              <a:gd name="adj" fmla="val 11538"/>
-            </a:avLst>
-          </a:prstGeom>
-          <a:solidFill>
-            <a:srgbClr val="F3DFD3"/>
-          </a:solidFill>
-          <a:ln/>
-        </p:spPr>
-      </p:sp>
-      <p:sp>
-        <p:nvSpPr>
-          <p:cNvPr id="17" name="Text 15"/>
-          <p:cNvSpPr txBox="1"/>
-          <p:nvPr/>
-        </p:nvSpPr>
-        <p:spPr>
-          <a:xfrm>
-            <a:off x="960120" y="4480560"/>
-            <a:ext cx="10271455" cy="566928"/>
+              <a:t>09 / 10</a:t>
+            </a:r>
+            <a:endParaRPr lang="en-US" sz="1450" dirty="0"/>
+          </a:p>
+        </p:txBody>
+      </p:sp>
+      <p:sp>
+        <p:nvSpPr>
+          <p:cNvPr id="18" name="Text 16"/>
+          <p:cNvSpPr txBox="1"/>
+          <p:nvPr/>
+        </p:nvSpPr>
+        <p:spPr>
+          <a:xfrm>
+            <a:off x="7132320" y="4069080"/>
+            <a:ext cx="4572000" cy="310896"/>
           </a:xfrm>
           <a:prstGeom prst="rect">
             <a:avLst/>
@@ -2893,13 +3132,10 @@
           <a:lstStyle/>
           <a:p>
             <a:pPr indent="0" marL="0">
-              <a:lnSpc>
-                <a:spcPts val="1900"/>
-              </a:lnSpc>
-              <a:buNone/>
-            </a:pPr>
-            <a:r>
-              <a:rPr lang="en-US" sz="1550" i="1" dirty="0">
+              <a:buNone/>
+            </a:pPr>
+            <a:r>
+              <a:rPr lang="en-US" sz="1450" b="1" dirty="0">
                 <a:solidFill>
                   <a:srgbClr val="33291F"/>
                 </a:solidFill>
@@ -2907,9 +3143,90 @@
                 <a:ea typeface="Cambria" pitchFamily="34" charset="-122"/>
                 <a:cs typeface="Cambria" pitchFamily="34" charset="-120"/>
               </a:rPr>
-              <a:t>O caminho 1 de erro, previsto no slide da hipótese, foi o que se materializou. A pergunta de pesquisa precisa ser reformulada.</a:t>
-            </a:r>
-            <a:endParaRPr lang="en-US" sz="1550" dirty="0"/>
+              <a:t>Consolidação</a:t>
+            </a:r>
+            <a:endParaRPr lang="en-US" sz="1450" dirty="0"/>
+          </a:p>
+        </p:txBody>
+      </p:sp>
+      <p:sp>
+        <p:nvSpPr>
+          <p:cNvPr id="19" name="Text 17"/>
+          <p:cNvSpPr txBox="1"/>
+          <p:nvPr/>
+        </p:nvSpPr>
+        <p:spPr>
+          <a:xfrm>
+            <a:off x="7132320" y="4416552"/>
+            <a:ext cx="4572000" cy="402336"/>
+          </a:xfrm>
+          <a:prstGeom prst="rect">
+            <a:avLst/>
+          </a:prstGeom>
+          <a:noFill/>
+          <a:ln/>
+        </p:spPr>
+        <p:txBody>
+          <a:bodyPr wrap="square" lIns="0" tIns="0" rIns="0" bIns="0" rtlCol="0" anchor="ctr"/>
+          <a:lstStyle/>
+          <a:p>
+            <a:pPr indent="0" marL="0">
+              <a:lnSpc>
+                <a:spcPts val="1450"/>
+              </a:lnSpc>
+              <a:buNone/>
+            </a:pPr>
+            <a:r>
+              <a:rPr lang="en-US" sz="1200" dirty="0">
+                <a:solidFill>
+                  <a:srgbClr val="5C4F41"/>
+                </a:solidFill>
+              </a:rPr>
+              <a:t>Análise crítica, relatório final e apresentação.</a:t>
+            </a:r>
+            <a:endParaRPr lang="en-US" sz="1200" dirty="0"/>
+          </a:p>
+        </p:txBody>
+      </p:sp>
+      <p:sp>
+        <p:nvSpPr>
+          <p:cNvPr id="20" name="Text 18"/>
+          <p:cNvSpPr txBox="1"/>
+          <p:nvPr/>
+        </p:nvSpPr>
+        <p:spPr>
+          <a:xfrm>
+            <a:off x="685800" y="5138928"/>
+            <a:ext cx="10820095" cy="548640"/>
+          </a:xfrm>
+          <a:prstGeom prst="rect">
+            <a:avLst/>
+          </a:prstGeom>
+          <a:noFill/>
+          <a:ln/>
+        </p:spPr>
+        <p:txBody>
+          <a:bodyPr wrap="square" lIns="0" tIns="0" rIns="0" bIns="0" rtlCol="0" anchor="ctr"/>
+          <a:lstStyle/>
+          <a:p>
+            <a:pPr indent="0" marL="0">
+              <a:lnSpc>
+                <a:spcPts val="2100"/>
+              </a:lnSpc>
+              <a:buNone/>
+            </a:pPr>
+            <a:r>
+              <a:rPr lang="en-US" sz="1700" b="1" dirty="0">
+                <a:solidFill>
+                  <a:srgbClr val="33291F"/>
+                </a:solidFill>
+                <a:latin typeface="Cambria" pitchFamily="34" charset="0"/>
+                <a:ea typeface="Cambria" pitchFamily="34" charset="-122"/>
+                <a:cs typeface="Cambria" pitchFamily="34" charset="-120"/>
+              </a:rPr>
+              <a:t>O desfecho contrário à hipótese também é resultado: delimitaria as condições em que o paradigma compensa.</a:t>
+            </a:r>
+            <a:endParaRPr lang="en-US" sz="1700" dirty="0"/>
           </a:p>
         </p:txBody>
       </p:sp>
@@ -3013,7 +3330,7 @@
                   <a:srgbClr val="B35C38"/>
                 </a:solidFill>
               </a:rPr>
-              <a:t>ONDE ISSO NOS DEIXA</a:t>
+              <a:t>IMPLEMENTAÇÃO EXPLORATÓRIA</a:t>
             </a:r>
             <a:endParaRPr lang="en-US" sz="1100" dirty="0"/>
           </a:p>
@@ -3055,7 +3372,7 @@
                 <a:ea typeface="Cambria" pitchFamily="34" charset="-122"/>
                 <a:cs typeface="Cambria" pitchFamily="34" charset="-120"/>
               </a:rPr>
-              <a:t>A pergunta certa não é se encontra o plano</a:t>
+              <a:t>Três coisas que já aprendemos, uma delas contra nós</a:t>
             </a:r>
             <a:endParaRPr lang="en-US" sz="3400" dirty="0"/>
           </a:p>
@@ -3063,82 +3380,18 @@
       </p:sp>
       <p:sp>
         <p:nvSpPr>
-          <p:cNvPr id="4" name="tese"/>
+          <p:cNvPr id="4" name="achado0"/>
           <p:cNvSpPr/>
           <p:nvPr/>
         </p:nvSpPr>
         <p:spPr>
           <a:xfrm>
-            <a:off x="685800" y="1755648"/>
-            <a:ext cx="10820095" cy="1417320"/>
+            <a:off x="685800" y="1810512"/>
+            <a:ext cx="3448202" cy="2286000"/>
           </a:xfrm>
           <a:prstGeom prst="roundRect">
             <a:avLst>
-              <a:gd name="adj" fmla="val 5806"/>
-            </a:avLst>
-          </a:prstGeom>
-          <a:solidFill>
-            <a:srgbClr val="DDE7E0"/>
-          </a:solidFill>
-          <a:ln/>
-        </p:spPr>
-      </p:sp>
-      <p:sp>
-        <p:nvSpPr>
-          <p:cNvPr id="5" name="Text 3"/>
-          <p:cNvSpPr txBox="1"/>
-          <p:nvPr/>
-        </p:nvSpPr>
-        <p:spPr>
-          <a:xfrm>
-            <a:off x="996696" y="1938528"/>
-            <a:ext cx="10198303" cy="1060704"/>
-          </a:xfrm>
-          <a:prstGeom prst="rect">
-            <a:avLst/>
-          </a:prstGeom>
-          <a:noFill/>
-          <a:ln/>
-        </p:spPr>
-        <p:txBody>
-          <a:bodyPr wrap="square" lIns="0" tIns="0" rIns="0" bIns="0" rtlCol="0" anchor="ctr"/>
-          <a:lstStyle/>
-          <a:p>
-            <a:pPr indent="0" marL="0">
-              <a:lnSpc>
-                <a:spcPts val="2600"/>
-              </a:lnSpc>
-              <a:buNone/>
-            </a:pPr>
-            <a:r>
-              <a:rPr lang="en-US" sz="2000" b="1" dirty="0">
-                <a:solidFill>
-                  <a:srgbClr val="33291F"/>
-                </a:solidFill>
-                <a:latin typeface="Cambria" pitchFamily="34" charset="0"/>
-                <a:ea typeface="Cambria" pitchFamily="34" charset="-122"/>
-                <a:cs typeface="Cambria" pitchFamily="34" charset="-120"/>
-              </a:rPr>
-              <a:t>O executor procedural depende de alguém descobrir cada interação entre regras antes de respeitá-la. O planejamento, não.</a:t>
-            </a:r>
-            <a:endParaRPr lang="en-US" sz="2000" dirty="0"/>
-          </a:p>
-        </p:txBody>
-      </p:sp>
-      <p:sp>
-        <p:nvSpPr>
-          <p:cNvPr id="6" name="sobrevive"/>
-          <p:cNvSpPr/>
-          <p:nvPr/>
-        </p:nvSpPr>
-        <p:spPr>
-          <a:xfrm>
-            <a:off x="685800" y="3419856"/>
-            <a:ext cx="5047488" cy="1700784"/>
-          </a:xfrm>
-          <a:prstGeom prst="roundRect">
-            <a:avLst>
-              <a:gd name="adj" fmla="val 5376"/>
+              <a:gd name="adj" fmla="val 4000"/>
             </a:avLst>
           </a:prstGeom>
           <a:solidFill>
@@ -3161,14 +3414,14 @@
       </p:sp>
       <p:sp>
         <p:nvSpPr>
-          <p:cNvPr id="7" name="Text 5"/>
-          <p:cNvSpPr txBox="1"/>
-          <p:nvPr/>
-        </p:nvSpPr>
-        <p:spPr>
-          <a:xfrm>
-            <a:off x="923544" y="3621024"/>
-            <a:ext cx="4572000" cy="274320"/>
+          <p:cNvPr id="5" name="Text 3"/>
+          <p:cNvSpPr txBox="1"/>
+          <p:nvPr/>
+        </p:nvSpPr>
+        <p:spPr>
+          <a:xfrm>
+            <a:off x="923544" y="2011680"/>
+            <a:ext cx="2972714" cy="274320"/>
           </a:xfrm>
           <a:prstGeom prst="rect">
             <a:avLst/>
@@ -3189,7 +3442,7 @@
                   <a:srgbClr val="4A6B5B"/>
                 </a:solidFill>
               </a:rPr>
-              <a:t>O QUE SUSTENTAMOS</a:t>
+              <a:t>A FAVOR</a:t>
             </a:r>
             <a:endParaRPr lang="en-US" sz="1250" dirty="0"/>
           </a:p>
@@ -3197,14 +3450,14 @@
       </p:sp>
       <p:sp>
         <p:nvSpPr>
-          <p:cNvPr id="8" name="Text 6"/>
-          <p:cNvSpPr txBox="1"/>
-          <p:nvPr/>
-        </p:nvSpPr>
-        <p:spPr>
-          <a:xfrm>
-            <a:off x="923544" y="3950208"/>
-            <a:ext cx="4572000" cy="384048"/>
+          <p:cNvPr id="6" name="Text 4"/>
+          <p:cNvSpPr txBox="1"/>
+          <p:nvPr/>
+        </p:nvSpPr>
+        <p:spPr>
+          <a:xfrm>
+            <a:off x="923544" y="2340864"/>
+            <a:ext cx="2972714" cy="603504"/>
           </a:xfrm>
           <a:prstGeom prst="rect">
             <a:avLst/>
@@ -3223,7 +3476,7 @@
               <a:buNone/>
             </a:pPr>
             <a:r>
-              <a:rPr lang="en-US" sz="1700" b="1" dirty="0">
+              <a:rPr lang="en-US" sz="1600" b="1" dirty="0">
                 <a:solidFill>
                   <a:srgbClr val="33291F"/>
                 </a:solidFill>
@@ -3231,22 +3484,22 @@
                 <a:ea typeface="Cambria" pitchFamily="34" charset="-122"/>
                 <a:cs typeface="Cambria" pitchFamily="34" charset="-120"/>
               </a:rPr>
-              <a:t>Declaratividade e prova</a:t>
-            </a:r>
-            <a:endParaRPr lang="en-US" sz="1700" dirty="0"/>
-          </a:p>
-        </p:txBody>
-      </p:sp>
-      <p:sp>
-        <p:nvSpPr>
-          <p:cNvPr id="9" name="Text 7"/>
-          <p:cNvSpPr txBox="1"/>
-          <p:nvPr/>
-        </p:nvSpPr>
-        <p:spPr>
-          <a:xfrm>
-            <a:off x="923544" y="4407408"/>
-            <a:ext cx="4572000" cy="548640"/>
+              <a:t>A busca trivial não escala</a:t>
+            </a:r>
+            <a:endParaRPr lang="en-US" sz="1600" dirty="0"/>
+          </a:p>
+        </p:txBody>
+      </p:sp>
+      <p:sp>
+        <p:nvSpPr>
+          <p:cNvPr id="7" name="Text 5"/>
+          <p:cNvSpPr txBox="1"/>
+          <p:nvPr/>
+        </p:nvSpPr>
+        <p:spPr>
+          <a:xfrm>
+            <a:off x="923544" y="3017520"/>
+            <a:ext cx="2972714" cy="914400"/>
           </a:xfrm>
           <a:prstGeom prst="rect">
             <a:avLst/>
@@ -3260,36 +3513,36 @@
           <a:p>
             <a:pPr indent="0" marL="0">
               <a:lnSpc>
-                <a:spcPts val="1700"/>
-              </a:lnSpc>
-              <a:buNone/>
-            </a:pPr>
-            <a:r>
-              <a:rPr lang="en-US" sz="1350" dirty="0">
+                <a:spcPts val="1650"/>
+              </a:lnSpc>
+              <a:buNone/>
+            </a:pPr>
+            <a:r>
+              <a:rPr lang="en-US" sz="1300" dirty="0">
                 <a:solidFill>
                   <a:srgbClr val="5C4F41"/>
                 </a:solidFill>
               </a:rPr>
-              <a:t>Regra nova é absorvida sem tocar no código de busca, e a inviabilidade é demonstrada, não apenas constatada.</a:t>
-            </a:r>
-            <a:endParaRPr lang="en-US" sz="1350" dirty="0"/>
-          </a:p>
-        </p:txBody>
-      </p:sp>
-      <p:sp>
-        <p:nvSpPr>
-          <p:cNvPr id="10" name="caiu"/>
+              <a:t>Varrer o mesmo modelo declarativo sem heurística resolve até 5 ou 6 pacientes. Um turno real tem de 10 a 15.</a:t>
+            </a:r>
+            <a:endParaRPr lang="en-US" sz="1300" dirty="0"/>
+          </a:p>
+        </p:txBody>
+      </p:sp>
+      <p:sp>
+        <p:nvSpPr>
+          <p:cNvPr id="8" name="achado1"/>
           <p:cNvSpPr/>
           <p:nvPr/>
         </p:nvSpPr>
         <p:spPr>
           <a:xfrm>
-            <a:off x="5971032" y="3419856"/>
-            <a:ext cx="5047488" cy="1700784"/>
+            <a:off x="4371746" y="1810512"/>
+            <a:ext cx="3448202" cy="2286000"/>
           </a:xfrm>
           <a:prstGeom prst="roundRect">
             <a:avLst>
-              <a:gd name="adj" fmla="val 5376"/>
+              <a:gd name="adj" fmla="val 4000"/>
             </a:avLst>
           </a:prstGeom>
           <a:solidFill>
@@ -3312,14 +3565,14 @@
       </p:sp>
       <p:sp>
         <p:nvSpPr>
-          <p:cNvPr id="11" name="Text 9"/>
-          <p:cNvSpPr txBox="1"/>
-          <p:nvPr/>
-        </p:nvSpPr>
-        <p:spPr>
-          <a:xfrm>
-            <a:off x="6208776" y="3621024"/>
-            <a:ext cx="4572000" cy="274320"/>
+          <p:cNvPr id="9" name="Text 7"/>
+          <p:cNvSpPr txBox="1"/>
+          <p:nvPr/>
+        </p:nvSpPr>
+        <p:spPr>
+          <a:xfrm>
+            <a:off x="4609490" y="2011680"/>
+            <a:ext cx="2972714" cy="274320"/>
           </a:xfrm>
           <a:prstGeom prst="rect">
             <a:avLst/>
@@ -3337,10 +3590,10 @@
             <a:r>
               <a:rPr lang="en-US" sz="1250" b="1" spc="100" kern="0" dirty="0">
                 <a:solidFill>
-                  <a:srgbClr val="B35C38"/>
-                </a:solidFill>
-              </a:rPr>
-              <a:t>O QUE NÃO SUSTENTAMOS</a:t>
+                  <a:srgbClr val="4A6B5B"/>
+                </a:solidFill>
+              </a:rPr>
+              <a:t>A FAVOR</a:t>
             </a:r>
             <a:endParaRPr lang="en-US" sz="1250" dirty="0"/>
           </a:p>
@@ -3348,14 +3601,14 @@
       </p:sp>
       <p:sp>
         <p:nvSpPr>
-          <p:cNvPr id="12" name="Text 10"/>
-          <p:cNvSpPr txBox="1"/>
-          <p:nvPr/>
-        </p:nvSpPr>
-        <p:spPr>
-          <a:xfrm>
-            <a:off x="6208776" y="3950208"/>
-            <a:ext cx="4572000" cy="384048"/>
+          <p:cNvPr id="10" name="Text 8"/>
+          <p:cNvSpPr txBox="1"/>
+          <p:nvPr/>
+        </p:nvSpPr>
+        <p:spPr>
+          <a:xfrm>
+            <a:off x="4609490" y="2340864"/>
+            <a:ext cx="2972714" cy="603504"/>
           </a:xfrm>
           <a:prstGeom prst="rect">
             <a:avLst/>
@@ -3374,7 +3627,7 @@
               <a:buNone/>
             </a:pPr>
             <a:r>
-              <a:rPr lang="en-US" sz="1700" b="1" dirty="0">
+              <a:rPr lang="en-US" sz="1600" b="1" dirty="0">
                 <a:solidFill>
                   <a:srgbClr val="33291F"/>
                 </a:solidFill>
@@ -3382,11 +3635,84 @@
                 <a:ea typeface="Cambria" pitchFamily="34" charset="-122"/>
                 <a:cs typeface="Cambria" pitchFamily="34" charset="-120"/>
               </a:rPr>
-              <a:t>Economia e exclusividade</a:t>
-            </a:r>
-            <a:endParaRPr lang="en-US" sz="1700" dirty="0"/>
-          </a:p>
-        </p:txBody>
+              <a:t>O planejador está correto</a:t>
+            </a:r>
+            <a:endParaRPr lang="en-US" sz="1600" dirty="0"/>
+          </a:p>
+        </p:txBody>
+      </p:sp>
+      <p:sp>
+        <p:nvSpPr>
+          <p:cNvPr id="11" name="Text 9"/>
+          <p:cNvSpPr txBox="1"/>
+          <p:nvPr/>
+        </p:nvSpPr>
+        <p:spPr>
+          <a:xfrm>
+            <a:off x="4609490" y="3017520"/>
+            <a:ext cx="2972714" cy="914400"/>
+          </a:xfrm>
+          <a:prstGeom prst="rect">
+            <a:avLst/>
+          </a:prstGeom>
+          <a:noFill/>
+          <a:ln/>
+        </p:spPr>
+        <p:txBody>
+          <a:bodyPr wrap="square" lIns="0" tIns="0" rIns="0" bIns="0" rtlCol="0" anchor="t"/>
+          <a:lstStyle/>
+          <a:p>
+            <a:pPr indent="0" marL="0">
+              <a:lnSpc>
+                <a:spcPts val="1650"/>
+              </a:lnSpc>
+              <a:buNone/>
+            </a:pPr>
+            <a:r>
+              <a:rPr lang="en-US" sz="1300" dirty="0">
+                <a:solidFill>
+                  <a:srgbClr val="5C4F41"/>
+                </a:solidFill>
+              </a:rPr>
+              <a:t>Um planejador de referência independente concordou sobre viabilidade e plano mínimo em todas as instâncias testadas.</a:t>
+            </a:r>
+            <a:endParaRPr lang="en-US" sz="1300" dirty="0"/>
+          </a:p>
+        </p:txBody>
+      </p:sp>
+      <p:sp>
+        <p:nvSpPr>
+          <p:cNvPr id="12" name="achado2"/>
+          <p:cNvSpPr/>
+          <p:nvPr/>
+        </p:nvSpPr>
+        <p:spPr>
+          <a:xfrm>
+            <a:off x="8057693" y="1810512"/>
+            <a:ext cx="3448202" cy="2286000"/>
+          </a:xfrm>
+          <a:prstGeom prst="roundRect">
+            <a:avLst>
+              <a:gd name="adj" fmla="val 4000"/>
+            </a:avLst>
+          </a:prstGeom>
+          <a:solidFill>
+            <a:srgbClr val="F3DFD3"/>
+          </a:solidFill>
+          <a:ln w="9525">
+            <a:solidFill>
+              <a:srgbClr val="E6DCCB"/>
+            </a:solidFill>
+            <a:prstDash val="solid"/>
+          </a:ln>
+          <a:effectLst>
+            <a:outerShdw sx="100000" sy="100000" kx="0" ky="0" algn="bl" rotWithShape="0" blurRad="127000" dist="25400" dir="5400000">
+              <a:srgbClr val="33291F">
+                <a:alpha val="10000"/>
+              </a:srgbClr>
+            </a:outerShdw>
+          </a:effectLst>
+        </p:spPr>
       </p:sp>
       <p:sp>
         <p:nvSpPr>
@@ -3396,34 +3722,31 @@
         </p:nvSpPr>
         <p:spPr>
           <a:xfrm>
-            <a:off x="6208776" y="4407408"/>
-            <a:ext cx="4572000" cy="548640"/>
-          </a:xfrm>
-          <a:prstGeom prst="rect">
-            <a:avLst/>
-          </a:prstGeom>
-          <a:noFill/>
-          <a:ln/>
-        </p:spPr>
-        <p:txBody>
-          <a:bodyPr wrap="square" lIns="0" tIns="0" rIns="0" bIns="0" rtlCol="0" anchor="t"/>
-          <a:lstStyle/>
-          <a:p>
-            <a:pPr indent="0" marL="0">
-              <a:lnSpc>
-                <a:spcPts val="1700"/>
-              </a:lnSpc>
-              <a:buNone/>
-            </a:pPr>
-            <a:r>
-              <a:rPr lang="en-US" sz="1350" dirty="0">
-                <a:solidFill>
-                  <a:srgbClr val="5C4F41"/>
-                </a:solidFill>
-              </a:rPr>
-              <a:t>Não economiza deslocamento, e não encontra planos que um programa corrigido não encontraria.</a:t>
-            </a:r>
-            <a:endParaRPr lang="en-US" sz="1350" dirty="0"/>
+            <a:off x="8295437" y="2011680"/>
+            <a:ext cx="2972714" cy="274320"/>
+          </a:xfrm>
+          <a:prstGeom prst="rect">
+            <a:avLst/>
+          </a:prstGeom>
+          <a:noFill/>
+          <a:ln/>
+        </p:spPr>
+        <p:txBody>
+          <a:bodyPr wrap="square" lIns="0" tIns="0" rIns="0" bIns="0" rtlCol="0" anchor="ctr"/>
+          <a:lstStyle/>
+          <a:p>
+            <a:pPr indent="0" marL="0">
+              <a:buNone/>
+            </a:pPr>
+            <a:r>
+              <a:rPr lang="en-US" sz="1250" b="1" spc="100" kern="0" dirty="0">
+                <a:solidFill>
+                  <a:srgbClr val="B35C38"/>
+                </a:solidFill>
+              </a:rPr>
+              <a:t>CONTRA A HIPÓTESE</a:t>
+            </a:r>
+            <a:endParaRPr lang="en-US" sz="1250" dirty="0"/>
           </a:p>
         </p:txBody>
       </p:sp>
@@ -3435,8 +3758,8 @@
         </p:nvSpPr>
         <p:spPr>
           <a:xfrm>
-            <a:off x="685800" y="5340096"/>
-            <a:ext cx="10820095" cy="548640"/>
+            <a:off x="8295437" y="2340864"/>
+            <a:ext cx="2972714" cy="603504"/>
           </a:xfrm>
           <a:prstGeom prst="rect">
             <a:avLst/>
@@ -3455,7 +3778,7 @@
               <a:buNone/>
             </a:pPr>
             <a:r>
-              <a:rPr lang="en-US" sz="1700" b="1" dirty="0">
+              <a:rPr lang="en-US" sz="1600" b="1" dirty="0">
                 <a:solidFill>
                   <a:srgbClr val="33291F"/>
                 </a:solidFill>
@@ -3463,9 +3786,112 @@
                 <a:ea typeface="Cambria" pitchFamily="34" charset="-122"/>
                 <a:cs typeface="Cambria" pitchFamily="34" charset="-120"/>
               </a:rPr>
-              <a:t>A pergunta vira: o que mantém o sistema correto quando a norma muda, sem deixar de caber num turno real?</a:t>
-            </a:r>
-            <a:endParaRPr lang="en-US" sz="1700" dirty="0"/>
+              <a:t>A hipótese foi refutada</a:t>
+            </a:r>
+            <a:endParaRPr lang="en-US" sz="1600" dirty="0"/>
+          </a:p>
+        </p:txBody>
+      </p:sp>
+      <p:sp>
+        <p:nvSpPr>
+          <p:cNvPr id="15" name="Text 13"/>
+          <p:cNvSpPr txBox="1"/>
+          <p:nvPr/>
+        </p:nvSpPr>
+        <p:spPr>
+          <a:xfrm>
+            <a:off x="8295437" y="3017520"/>
+            <a:ext cx="2972714" cy="914400"/>
+          </a:xfrm>
+          <a:prstGeom prst="rect">
+            <a:avLst/>
+          </a:prstGeom>
+          <a:noFill/>
+          <a:ln/>
+        </p:spPr>
+        <p:txBody>
+          <a:bodyPr wrap="square" lIns="0" tIns="0" rIns="0" bIns="0" rtlCol="0" anchor="t"/>
+          <a:lstStyle/>
+          <a:p>
+            <a:pPr indent="0" marL="0">
+              <a:lnSpc>
+                <a:spcPts val="1650"/>
+              </a:lnSpc>
+              <a:buNone/>
+            </a:pPr>
+            <a:r>
+              <a:rPr lang="en-US" sz="1300" dirty="0">
+                <a:solidFill>
+                  <a:srgbClr val="5C4F41"/>
+                </a:solidFill>
+              </a:rPr>
+              <a:t>Uma correção manual no executor procedural zera os falsos negativos. Ele não era incapaz: faltava-lhe a regra.</a:t>
+            </a:r>
+            <a:endParaRPr lang="en-US" sz="1300" dirty="0"/>
+          </a:p>
+        </p:txBody>
+      </p:sp>
+      <p:sp>
+        <p:nvSpPr>
+          <p:cNvPr id="16" name="fecho"/>
+          <p:cNvSpPr/>
+          <p:nvPr/>
+        </p:nvSpPr>
+        <p:spPr>
+          <a:xfrm>
+            <a:off x="685800" y="4407408"/>
+            <a:ext cx="10820095" cy="713232"/>
+          </a:xfrm>
+          <a:prstGeom prst="roundRect">
+            <a:avLst>
+              <a:gd name="adj" fmla="val 11538"/>
+            </a:avLst>
+          </a:prstGeom>
+          <a:solidFill>
+            <a:srgbClr val="F3DFD3"/>
+          </a:solidFill>
+          <a:ln/>
+        </p:spPr>
+      </p:sp>
+      <p:sp>
+        <p:nvSpPr>
+          <p:cNvPr id="17" name="Text 15"/>
+          <p:cNvSpPr txBox="1"/>
+          <p:nvPr/>
+        </p:nvSpPr>
+        <p:spPr>
+          <a:xfrm>
+            <a:off x="960120" y="4480560"/>
+            <a:ext cx="10271455" cy="566928"/>
+          </a:xfrm>
+          <a:prstGeom prst="rect">
+            <a:avLst/>
+          </a:prstGeom>
+          <a:noFill/>
+          <a:ln/>
+        </p:spPr>
+        <p:txBody>
+          <a:bodyPr wrap="square" lIns="0" tIns="0" rIns="0" bIns="0" rtlCol="0" anchor="ctr"/>
+          <a:lstStyle/>
+          <a:p>
+            <a:pPr indent="0" marL="0">
+              <a:lnSpc>
+                <a:spcPts val="1900"/>
+              </a:lnSpc>
+              <a:buNone/>
+            </a:pPr>
+            <a:r>
+              <a:rPr lang="en-US" sz="1550" i="1" dirty="0">
+                <a:solidFill>
+                  <a:srgbClr val="33291F"/>
+                </a:solidFill>
+                <a:latin typeface="Cambria" pitchFamily="34" charset="0"/>
+                <a:ea typeface="Cambria" pitchFamily="34" charset="-122"/>
+                <a:cs typeface="Cambria" pitchFamily="34" charset="-120"/>
+              </a:rPr>
+              <a:t>O caminho 1 de erro, previsto no slide da hipótese, foi o que se materializou. A pergunta de pesquisa precisa ser reformulada.</a:t>
+            </a:r>
+            <a:endParaRPr lang="en-US" sz="1550" dirty="0"/>
           </a:p>
         </p:txBody>
       </p:sp>
@@ -3509,6 +3935,524 @@
             <a:fld id="{F7021451-1387-4CA6-816F-3879F97B5CBC}" type="slidenum">
               <a:rPr b="0" lang="en-US"/>
               <a:t>11</a:t>
+            </a:fld>
+            <a:endParaRPr lang="en-US"/>
+          </a:p>
+        </p:txBody>
+      </p:sp>
+    </p:spTree>
+  </p:cSld>
+  <p:clrMapOvr>
+    <a:masterClrMapping/>
+  </p:clrMapOvr>
+</p:sld>
+</file>
+
+<file path=ppt/slides/slide12.xml><?xml version="1.0" encoding="utf-8"?>
+<p:sld xmlns:a="http://schemas.openxmlformats.org/drawingml/2006/main" xmlns:r="http://schemas.openxmlformats.org/officeDocument/2006/relationships" xmlns:p="http://schemas.openxmlformats.org/presentationml/2006/main">
+  <p:cSld name="Slide 12">
+    <p:spTree>
+      <p:nvGrpSpPr>
+        <p:cNvPr id="1" name=""/>
+        <p:cNvGrpSpPr/>
+        <p:nvPr/>
+      </p:nvGrpSpPr>
+      <p:grpSpPr>
+        <a:xfrm>
+          <a:off x="0" y="0"/>
+          <a:ext cx="0" cy="0"/>
+          <a:chOff x="0" y="0"/>
+          <a:chExt cx="0" cy="0"/>
+        </a:xfrm>
+      </p:grpSpPr>
+      <p:sp>
+        <p:nvSpPr>
+          <p:cNvPr id="2" name="Text 0"/>
+          <p:cNvSpPr txBox="1"/>
+          <p:nvPr/>
+        </p:nvSpPr>
+        <p:spPr>
+          <a:xfrm>
+            <a:off x="685800" y="420624"/>
+            <a:ext cx="10820095" cy="274320"/>
+          </a:xfrm>
+          <a:prstGeom prst="rect">
+            <a:avLst/>
+          </a:prstGeom>
+          <a:noFill/>
+          <a:ln/>
+        </p:spPr>
+        <p:txBody>
+          <a:bodyPr wrap="square" lIns="0" tIns="0" rIns="0" bIns="0" rtlCol="0" anchor="ctr"/>
+          <a:lstStyle/>
+          <a:p>
+            <a:pPr indent="0" marL="0">
+              <a:buNone/>
+            </a:pPr>
+            <a:r>
+              <a:rPr lang="en-US" sz="1100" b="1" spc="220" kern="0" dirty="0">
+                <a:solidFill>
+                  <a:srgbClr val="B35C38"/>
+                </a:solidFill>
+              </a:rPr>
+              <a:t>REFORMULAÇÃO DA HIPÓTESE</a:t>
+            </a:r>
+            <a:endParaRPr lang="en-US" sz="1100" dirty="0"/>
+          </a:p>
+        </p:txBody>
+      </p:sp>
+      <p:sp>
+        <p:nvSpPr>
+          <p:cNvPr id="3" name="Text 1"/>
+          <p:cNvSpPr txBox="1"/>
+          <p:nvPr/>
+        </p:nvSpPr>
+        <p:spPr>
+          <a:xfrm>
+            <a:off x="685800" y="749808"/>
+            <a:ext cx="10820095" cy="868680"/>
+          </a:xfrm>
+          <a:prstGeom prst="rect">
+            <a:avLst/>
+          </a:prstGeom>
+          <a:noFill/>
+          <a:ln/>
+        </p:spPr>
+        <p:txBody>
+          <a:bodyPr wrap="square" lIns="0" tIns="0" rIns="0" bIns="0" rtlCol="0" anchor="t"/>
+          <a:lstStyle/>
+          <a:p>
+            <a:pPr indent="0" marL="0">
+              <a:lnSpc>
+                <a:spcPts val="3800"/>
+              </a:lnSpc>
+              <a:buNone/>
+            </a:pPr>
+            <a:r>
+              <a:rPr lang="en-US" sz="3400" b="1" dirty="0">
+                <a:solidFill>
+                  <a:srgbClr val="33291F"/>
+                </a:solidFill>
+                <a:latin typeface="Cambria" pitchFamily="34" charset="0"/>
+                <a:ea typeface="Cambria" pitchFamily="34" charset="-122"/>
+                <a:cs typeface="Cambria" pitchFamily="34" charset="-120"/>
+              </a:rPr>
+              <a:t>O que o trabalho passa a defender</a:t>
+            </a:r>
+            <a:endParaRPr lang="en-US" sz="3400" dirty="0"/>
+          </a:p>
+        </p:txBody>
+      </p:sp>
+      <p:sp>
+        <p:nvSpPr>
+          <p:cNvPr id="4" name="nova-hipotese"/>
+          <p:cNvSpPr/>
+          <p:nvPr/>
+        </p:nvSpPr>
+        <p:spPr>
+          <a:xfrm>
+            <a:off x="685800" y="1755648"/>
+            <a:ext cx="10820095" cy="1481328"/>
+          </a:xfrm>
+          <a:prstGeom prst="roundRect">
+            <a:avLst>
+              <a:gd name="adj" fmla="val 5556"/>
+            </a:avLst>
+          </a:prstGeom>
+          <a:solidFill>
+            <a:srgbClr val="DDE7E0"/>
+          </a:solidFill>
+          <a:ln/>
+        </p:spPr>
+      </p:sp>
+      <p:sp>
+        <p:nvSpPr>
+          <p:cNvPr id="5" name="Text 3"/>
+          <p:cNvSpPr txBox="1"/>
+          <p:nvPr/>
+        </p:nvSpPr>
+        <p:spPr>
+          <a:xfrm>
+            <a:off x="996696" y="1938528"/>
+            <a:ext cx="10198303" cy="1133856"/>
+          </a:xfrm>
+          <a:prstGeom prst="rect">
+            <a:avLst/>
+          </a:prstGeom>
+          <a:noFill/>
+          <a:ln/>
+        </p:spPr>
+        <p:txBody>
+          <a:bodyPr wrap="square" lIns="0" tIns="0" rIns="0" bIns="0" rtlCol="0" anchor="ctr"/>
+          <a:lstStyle/>
+          <a:p>
+            <a:pPr indent="0" marL="0">
+              <a:lnSpc>
+                <a:spcPts val="2600"/>
+              </a:lnSpc>
+              <a:buNone/>
+            </a:pPr>
+            <a:r>
+              <a:rPr lang="en-US" sz="2000" b="1" dirty="0">
+                <a:solidFill>
+                  <a:srgbClr val="33291F"/>
+                </a:solidFill>
+                <a:latin typeface="Cambria" pitchFamily="34" charset="0"/>
+                <a:ea typeface="Cambria" pitchFamily="34" charset="-122"/>
+                <a:cs typeface="Cambria" pitchFamily="34" charset="-120"/>
+              </a:rPr>
+              <a:t>Manter a norma como especificação declarativa preserva a corretude do sistema diante de regras novas, a um custo de busca que ainda cabe num turno real.</a:t>
+            </a:r>
+            <a:endParaRPr lang="en-US" sz="2000" dirty="0"/>
+          </a:p>
+        </p:txBody>
+      </p:sp>
+      <p:sp>
+        <p:nvSpPr>
+          <p:cNvPr id="6" name="perna0"/>
+          <p:cNvSpPr/>
+          <p:nvPr/>
+        </p:nvSpPr>
+        <p:spPr>
+          <a:xfrm>
+            <a:off x="685800" y="3456432"/>
+            <a:ext cx="5047488" cy="1572768"/>
+          </a:xfrm>
+          <a:prstGeom prst="roundRect">
+            <a:avLst>
+              <a:gd name="adj" fmla="val 5814"/>
+            </a:avLst>
+          </a:prstGeom>
+          <a:solidFill>
+            <a:srgbClr val="FFFDF8"/>
+          </a:solidFill>
+          <a:ln w="9525">
+            <a:solidFill>
+              <a:srgbClr val="E6DCCB"/>
+            </a:solidFill>
+            <a:prstDash val="solid"/>
+          </a:ln>
+          <a:effectLst>
+            <a:outerShdw sx="100000" sy="100000" kx="0" ky="0" algn="bl" rotWithShape="0" blurRad="127000" dist="25400" dir="5400000">
+              <a:srgbClr val="33291F">
+                <a:alpha val="10000"/>
+              </a:srgbClr>
+            </a:outerShdw>
+          </a:effectLst>
+        </p:spPr>
+      </p:sp>
+      <p:sp>
+        <p:nvSpPr>
+          <p:cNvPr id="7" name="Text 5"/>
+          <p:cNvSpPr txBox="1"/>
+          <p:nvPr/>
+        </p:nvSpPr>
+        <p:spPr>
+          <a:xfrm>
+            <a:off x="923544" y="3639312"/>
+            <a:ext cx="4572000" cy="548640"/>
+          </a:xfrm>
+          <a:prstGeom prst="rect">
+            <a:avLst/>
+          </a:prstGeom>
+          <a:noFill/>
+          <a:ln/>
+        </p:spPr>
+        <p:txBody>
+          <a:bodyPr wrap="square" lIns="0" tIns="0" rIns="0" bIns="0" rtlCol="0" anchor="ctr"/>
+          <a:lstStyle/>
+          <a:p>
+            <a:pPr indent="0" marL="0">
+              <a:lnSpc>
+                <a:spcPts val="1900"/>
+              </a:lnSpc>
+              <a:buNone/>
+            </a:pPr>
+            <a:r>
+              <a:rPr lang="en-US" sz="1600" b="1" dirty="0">
+                <a:solidFill>
+                  <a:srgbClr val="B35C38"/>
+                </a:solidFill>
+                <a:latin typeface="Cambria" pitchFamily="34" charset="0"/>
+                <a:ea typeface="Cambria" pitchFamily="34" charset="-122"/>
+                <a:cs typeface="Cambria" pitchFamily="34" charset="-120"/>
+              </a:rPr>
+              <a:t>Tire a declaratividade</a:t>
+            </a:r>
+            <a:pPr indent="0" marL="0">
+              <a:lnSpc>
+                <a:spcPts val="1900"/>
+              </a:lnSpc>
+              <a:buNone/>
+            </a:pPr>
+            <a:r>
+              <a:rPr lang="en-US" sz="1300" dirty="0">
+                <a:solidFill>
+                  <a:srgbClr val="5C4F41"/>
+                </a:solidFill>
+                <a:latin typeface="Cambria" pitchFamily="34" charset="0"/>
+                <a:ea typeface="Cambria" pitchFamily="34" charset="-122"/>
+                <a:cs typeface="Cambria" pitchFamily="34" charset="-120"/>
+              </a:rPr>
+              <a:t>  e sobra o programa procedural</a:t>
+            </a:r>
+            <a:endParaRPr lang="en-US" sz="1600" dirty="0"/>
+          </a:p>
+        </p:txBody>
+      </p:sp>
+      <p:sp>
+        <p:nvSpPr>
+          <p:cNvPr id="8" name="Text 6"/>
+          <p:cNvSpPr txBox="1"/>
+          <p:nvPr/>
+        </p:nvSpPr>
+        <p:spPr>
+          <a:xfrm>
+            <a:off x="923544" y="4224528"/>
+            <a:ext cx="4572000" cy="603504"/>
+          </a:xfrm>
+          <a:prstGeom prst="rect">
+            <a:avLst/>
+          </a:prstGeom>
+          <a:noFill/>
+          <a:ln/>
+        </p:spPr>
+        <p:txBody>
+          <a:bodyPr wrap="square" lIns="0" tIns="0" rIns="0" bIns="0" rtlCol="0" anchor="ctr"/>
+          <a:lstStyle/>
+          <a:p>
+            <a:pPr indent="0" marL="0">
+              <a:lnSpc>
+                <a:spcPts val="1700"/>
+              </a:lnSpc>
+              <a:buNone/>
+            </a:pPr>
+            <a:r>
+              <a:rPr lang="en-US" sz="1350" dirty="0">
+                <a:solidFill>
+                  <a:srgbClr val="5C4F41"/>
+                </a:solidFill>
+              </a:rPr>
+              <a:t>Ele resolve bem as regras que alguém já analisou, e falha quando elas mudam.</a:t>
+            </a:r>
+            <a:endParaRPr lang="en-US" sz="1350" dirty="0"/>
+          </a:p>
+        </p:txBody>
+      </p:sp>
+      <p:sp>
+        <p:nvSpPr>
+          <p:cNvPr id="9" name="perna1"/>
+          <p:cNvSpPr/>
+          <p:nvPr/>
+        </p:nvSpPr>
+        <p:spPr>
+          <a:xfrm>
+            <a:off x="5971032" y="3456432"/>
+            <a:ext cx="5047488" cy="1572768"/>
+          </a:xfrm>
+          <a:prstGeom prst="roundRect">
+            <a:avLst>
+              <a:gd name="adj" fmla="val 5814"/>
+            </a:avLst>
+          </a:prstGeom>
+          <a:solidFill>
+            <a:srgbClr val="FFFDF8"/>
+          </a:solidFill>
+          <a:ln w="9525">
+            <a:solidFill>
+              <a:srgbClr val="E6DCCB"/>
+            </a:solidFill>
+            <a:prstDash val="solid"/>
+          </a:ln>
+          <a:effectLst>
+            <a:outerShdw sx="100000" sy="100000" kx="0" ky="0" algn="bl" rotWithShape="0" blurRad="127000" dist="25400" dir="5400000">
+              <a:srgbClr val="33291F">
+                <a:alpha val="10000"/>
+              </a:srgbClr>
+            </a:outerShdw>
+          </a:effectLst>
+        </p:spPr>
+      </p:sp>
+      <p:sp>
+        <p:nvSpPr>
+          <p:cNvPr id="10" name="Text 8"/>
+          <p:cNvSpPr txBox="1"/>
+          <p:nvPr/>
+        </p:nvSpPr>
+        <p:spPr>
+          <a:xfrm>
+            <a:off x="6208776" y="3639312"/>
+            <a:ext cx="4572000" cy="548640"/>
+          </a:xfrm>
+          <a:prstGeom prst="rect">
+            <a:avLst/>
+          </a:prstGeom>
+          <a:noFill/>
+          <a:ln/>
+        </p:spPr>
+        <p:txBody>
+          <a:bodyPr wrap="square" lIns="0" tIns="0" rIns="0" bIns="0" rtlCol="0" anchor="ctr"/>
+          <a:lstStyle/>
+          <a:p>
+            <a:pPr indent="0" marL="0">
+              <a:lnSpc>
+                <a:spcPts val="1900"/>
+              </a:lnSpc>
+              <a:buNone/>
+            </a:pPr>
+            <a:r>
+              <a:rPr lang="en-US" sz="1600" b="1" dirty="0">
+                <a:solidFill>
+                  <a:srgbClr val="B35C38"/>
+                </a:solidFill>
+                <a:latin typeface="Cambria" pitchFamily="34" charset="0"/>
+                <a:ea typeface="Cambria" pitchFamily="34" charset="-122"/>
+                <a:cs typeface="Cambria" pitchFamily="34" charset="-120"/>
+              </a:rPr>
+              <a:t>Tire a busca heurística</a:t>
+            </a:r>
+            <a:pPr indent="0" marL="0">
+              <a:lnSpc>
+                <a:spcPts val="1900"/>
+              </a:lnSpc>
+              <a:buNone/>
+            </a:pPr>
+            <a:r>
+              <a:rPr lang="en-US" sz="1300" dirty="0">
+                <a:solidFill>
+                  <a:srgbClr val="5C4F41"/>
+                </a:solidFill>
+                <a:latin typeface="Cambria" pitchFamily="34" charset="0"/>
+                <a:ea typeface="Cambria" pitchFamily="34" charset="-122"/>
+                <a:cs typeface="Cambria" pitchFamily="34" charset="-120"/>
+              </a:rPr>
+              <a:t>  e sobra a varredura cega</a:t>
+            </a:r>
+            <a:endParaRPr lang="en-US" sz="1600" dirty="0"/>
+          </a:p>
+        </p:txBody>
+      </p:sp>
+      <p:sp>
+        <p:nvSpPr>
+          <p:cNvPr id="11" name="Text 9"/>
+          <p:cNvSpPr txBox="1"/>
+          <p:nvPr/>
+        </p:nvSpPr>
+        <p:spPr>
+          <a:xfrm>
+            <a:off x="6208776" y="4224528"/>
+            <a:ext cx="4572000" cy="603504"/>
+          </a:xfrm>
+          <a:prstGeom prst="rect">
+            <a:avLst/>
+          </a:prstGeom>
+          <a:noFill/>
+          <a:ln/>
+        </p:spPr>
+        <p:txBody>
+          <a:bodyPr wrap="square" lIns="0" tIns="0" rIns="0" bIns="0" rtlCol="0" anchor="ctr"/>
+          <a:lstStyle/>
+          <a:p>
+            <a:pPr indent="0" marL="0">
+              <a:lnSpc>
+                <a:spcPts val="1700"/>
+              </a:lnSpc>
+              <a:buNone/>
+            </a:pPr>
+            <a:r>
+              <a:rPr lang="en-US" sz="1350" dirty="0">
+                <a:solidFill>
+                  <a:srgbClr val="5C4F41"/>
+                </a:solidFill>
+              </a:rPr>
+              <a:t>Ela absorve regra nova sem esforço, e não chega ao tamanho de um turno.</a:t>
+            </a:r>
+            <a:endParaRPr lang="en-US" sz="1350" dirty="0"/>
+          </a:p>
+        </p:txBody>
+      </p:sp>
+      <p:sp>
+        <p:nvSpPr>
+          <p:cNvPr id="12" name="Text 10"/>
+          <p:cNvSpPr txBox="1"/>
+          <p:nvPr/>
+        </p:nvSpPr>
+        <p:spPr>
+          <a:xfrm>
+            <a:off x="685800" y="5193792"/>
+            <a:ext cx="10820095" cy="548640"/>
+          </a:xfrm>
+          <a:prstGeom prst="rect">
+            <a:avLst/>
+          </a:prstGeom>
+          <a:noFill/>
+          <a:ln/>
+        </p:spPr>
+        <p:txBody>
+          <a:bodyPr wrap="square" lIns="0" tIns="0" rIns="0" bIns="0" rtlCol="0" anchor="ctr"/>
+          <a:lstStyle/>
+          <a:p>
+            <a:pPr indent="0" marL="0">
+              <a:lnSpc>
+                <a:spcPts val="2100"/>
+              </a:lnSpc>
+              <a:buNone/>
+            </a:pPr>
+            <a:r>
+              <a:rPr lang="en-US" sz="1700" b="1" dirty="0">
+                <a:solidFill>
+                  <a:srgbClr val="33291F"/>
+                </a:solidFill>
+                <a:latin typeface="Cambria" pitchFamily="34" charset="0"/>
+                <a:ea typeface="Cambria" pitchFamily="34" charset="-122"/>
+                <a:cs typeface="Cambria" pitchFamily="34" charset="-120"/>
+              </a:rPr>
+              <a:t>Nenhuma das duas metades sozinha resolve. Planejamento Automatizado é o nome da combinação.</a:t>
+            </a:r>
+            <a:endParaRPr lang="en-US" sz="1700" dirty="0"/>
+          </a:p>
+        </p:txBody>
+      </p:sp>
+      <p:sp>
+        <p:nvSpPr>
+          <p:cNvPr id="25" name="Slide Number Placeholder 0"/>
+          <p:cNvSpPr>
+            <a:spLocks noGrp="1"/>
+          </p:cNvSpPr>
+          <p:nvPr>
+            <p:ph type="sldNum" sz="quarter" idx="4294967295"/>
+          </p:nvPr>
+        </p:nvSpPr>
+        <p:spPr>
+          <a:xfrm>
+            <a:off x="11384280" y="6327648"/>
+            <a:ext cx="365760" cy="274320"/>
+          </a:xfrm>
+          <a:prstGeom prst="rect">
+            <a:avLst/>
+          </a:prstGeom>
+          <a:extLst>
+            <a:ext uri="{C572A759-6A51-4108-AA02-DFA0A04FC94B}">
+              <ma14:wrappingTextBoxFlag xmlns:ma14="http://schemas.microsoft.com/office/mac/drawingml/2011/main" val="0"/>
+            </a:ext>
+          </a:extLst>
+        </p:spPr>
+        <p:txBody>
+          <a:bodyPr/>
+          <a:lstStyle>
+            <a:lvl1pPr>
+              <a:defRPr sz="1000">
+                <a:solidFill>
+                  <a:srgbClr val="8A7A67"/>
+                </a:solidFill>
+              </a:defRPr>
+            </a:lvl1pPr>
+          </a:lstStyle>
+          <a:p>
+            <a:pPr algn="r"/>
+            <a:fld id="{F7021451-1387-4CA6-816F-3879F97B5CBC}" type="slidenum">
+              <a:rPr b="0" lang="en-US"/>
+              <a:t>12</a:t>
             </a:fld>
             <a:endParaRPr lang="en-US"/>
           </a:p>
@@ -6462,7 +7406,7 @@
                   <a:srgbClr val="B35C38"/>
                 </a:solidFill>
               </a:rPr>
-              <a:t>PROPOSTA DE ABORDAGEM</a:t>
+              <a:t>OBJETIVOS</a:t>
             </a:r>
             <a:endParaRPr lang="en-US" sz="1100" dirty="0"/>
           </a:p>
@@ -6504,7 +7448,7 @@
                 <a:ea typeface="Cambria" pitchFamily="34" charset="-122"/>
                 <a:cs typeface="Cambria" pitchFamily="34" charset="-120"/>
               </a:rPr>
-              <a:t>Três camadas, cada paradigma no seu lugar</a:t>
+              <a:t>O que será modelado, construído e medido</a:t>
             </a:r>
             <a:endParaRPr lang="en-US" sz="3400" dirty="0"/>
           </a:p>
@@ -6512,18 +7456,118 @@
       </p:sp>
       <p:sp>
         <p:nvSpPr>
-          <p:cNvPr id="4" name="camada1"/>
+          <p:cNvPr id="4" name="og"/>
           <p:cNvSpPr/>
           <p:nvPr/>
         </p:nvSpPr>
         <p:spPr>
           <a:xfrm>
-            <a:off x="685800" y="1783080"/>
-            <a:ext cx="10820095" cy="987552"/>
+            <a:off x="685800" y="1755648"/>
+            <a:ext cx="10820095" cy="1078992"/>
           </a:xfrm>
           <a:prstGeom prst="roundRect">
             <a:avLst>
-              <a:gd name="adj" fmla="val 7407"/>
+              <a:gd name="adj" fmla="val 7627"/>
+            </a:avLst>
+          </a:prstGeom>
+          <a:solidFill>
+            <a:srgbClr val="F3DFD3"/>
+          </a:solidFill>
+          <a:ln/>
+        </p:spPr>
+      </p:sp>
+      <p:sp>
+        <p:nvSpPr>
+          <p:cNvPr id="5" name="Text 3"/>
+          <p:cNvSpPr txBox="1"/>
+          <p:nvPr/>
+        </p:nvSpPr>
+        <p:spPr>
+          <a:xfrm>
+            <a:off x="978408" y="1865376"/>
+            <a:ext cx="3657600" cy="237744"/>
+          </a:xfrm>
+          <a:prstGeom prst="rect">
+            <a:avLst/>
+          </a:prstGeom>
+          <a:noFill/>
+          <a:ln/>
+        </p:spPr>
+        <p:txBody>
+          <a:bodyPr wrap="square" lIns="0" tIns="0" rIns="0" bIns="0" rtlCol="0" anchor="ctr"/>
+          <a:lstStyle/>
+          <a:p>
+            <a:pPr indent="0" marL="0">
+              <a:buNone/>
+            </a:pPr>
+            <a:r>
+              <a:rPr lang="en-US" sz="1150" b="1" spc="160" kern="0" dirty="0">
+                <a:solidFill>
+                  <a:srgbClr val="B35C38"/>
+                </a:solidFill>
+              </a:rPr>
+              <a:t>OBJETIVO GERAL</a:t>
+            </a:r>
+            <a:endParaRPr lang="en-US" sz="1150" dirty="0"/>
+          </a:p>
+        </p:txBody>
+      </p:sp>
+      <p:sp>
+        <p:nvSpPr>
+          <p:cNvPr id="6" name="Text 4"/>
+          <p:cNvSpPr txBox="1"/>
+          <p:nvPr/>
+        </p:nvSpPr>
+        <p:spPr>
+          <a:xfrm>
+            <a:off x="978408" y="2139696"/>
+            <a:ext cx="10234879" cy="603504"/>
+          </a:xfrm>
+          <a:prstGeom prst="rect">
+            <a:avLst/>
+          </a:prstGeom>
+          <a:noFill/>
+          <a:ln/>
+        </p:spPr>
+        <p:txBody>
+          <a:bodyPr wrap="square" lIns="0" tIns="0" rIns="0" bIns="0" rtlCol="0" anchor="ctr"/>
+          <a:lstStyle/>
+          <a:p>
+            <a:pPr indent="0" marL="0">
+              <a:lnSpc>
+                <a:spcPts val="2000"/>
+              </a:lnSpc>
+              <a:buNone/>
+            </a:pPr>
+            <a:r>
+              <a:rPr lang="en-US" sz="1550" dirty="0">
+                <a:solidFill>
+                  <a:srgbClr val="33291F"/>
+                </a:solidFill>
+                <a:latin typeface="Cambria" pitchFamily="34" charset="0"/>
+                <a:ea typeface="Cambria" pitchFamily="34" charset="-122"/>
+                <a:cs typeface="Cambria" pitchFamily="34" charset="-120"/>
+              </a:rPr>
+              <a:t>Modelar, implementar e validar um sistema de apoio ao planejamento de turnos de visitas domiciliares, e mensurar em que dimensões o paradigma supera um executor procedural equivalente.</a:t>
+            </a:r>
+            <a:endParaRPr lang="en-US" sz="1550" dirty="0"/>
+          </a:p>
+        </p:txBody>
+      </p:sp>
+      <p:sp>
+        <p:nvSpPr>
+          <p:cNvPr id="7" name="obj0"/>
+          <p:cNvSpPr/>
+          <p:nvPr/>
+        </p:nvSpPr>
+        <p:spPr>
+          <a:xfrm>
+            <a:off x="685800" y="3090672"/>
+            <a:ext cx="3448202" cy="1920240"/>
+          </a:xfrm>
+          <a:prstGeom prst="roundRect">
+            <a:avLst>
+              <a:gd name="adj" fmla="val 4762"/>
             </a:avLst>
           </a:prstGeom>
           <a:solidFill>
@@ -6546,70 +7590,14 @@
       </p:sp>
       <p:sp>
         <p:nvSpPr>
-          <p:cNvPr id="5" name="num1"/>
-          <p:cNvSpPr/>
-          <p:nvPr/>
-        </p:nvSpPr>
-        <p:spPr>
-          <a:xfrm>
-            <a:off x="941832" y="2057400"/>
-            <a:ext cx="438912" cy="438912"/>
-          </a:xfrm>
-          <a:prstGeom prst="ellipse">
-            <a:avLst/>
-          </a:prstGeom>
-          <a:solidFill>
-            <a:srgbClr val="B35C38"/>
-          </a:solidFill>
-          <a:ln/>
-        </p:spPr>
-      </p:sp>
-      <p:sp>
-        <p:nvSpPr>
-          <p:cNvPr id="6" name="Text 4"/>
-          <p:cNvSpPr txBox="1"/>
-          <p:nvPr/>
-        </p:nvSpPr>
-        <p:spPr>
-          <a:xfrm>
-            <a:off x="941832" y="2057400"/>
-            <a:ext cx="438912" cy="438912"/>
-          </a:xfrm>
-          <a:prstGeom prst="rect">
-            <a:avLst/>
-          </a:prstGeom>
-          <a:noFill/>
-          <a:ln/>
-        </p:spPr>
-        <p:txBody>
-          <a:bodyPr wrap="square" lIns="0" tIns="0" rIns="0" bIns="0" rtlCol="0" anchor="ctr"/>
-          <a:lstStyle/>
-          <a:p>
-            <a:pPr algn="ctr" indent="0" marL="0">
-              <a:buNone/>
-            </a:pPr>
-            <a:r>
-              <a:rPr lang="en-US" sz="1500" b="1" dirty="0">
-                <a:solidFill>
-                  <a:srgbClr val="FFFFFF"/>
-                </a:solidFill>
-              </a:rPr>
-              <a:t>1</a:t>
-            </a:r>
-            <a:endParaRPr lang="en-US" sz="1500" dirty="0"/>
-          </a:p>
-        </p:txBody>
-      </p:sp>
-      <p:sp>
-        <p:nvSpPr>
-          <p:cNvPr id="7" name="Text 5"/>
-          <p:cNvSpPr txBox="1"/>
-          <p:nvPr/>
-        </p:nvSpPr>
-        <p:spPr>
-          <a:xfrm>
-            <a:off x="1554480" y="1938528"/>
-            <a:ext cx="3931920" cy="347472"/>
+          <p:cNvPr id="8" name="Text 6"/>
+          <p:cNvSpPr txBox="1"/>
+          <p:nvPr/>
+        </p:nvSpPr>
+        <p:spPr>
+          <a:xfrm>
+            <a:off x="923544" y="3273552"/>
+            <a:ext cx="2972714" cy="310896"/>
           </a:xfrm>
           <a:prstGeom prst="rect">
             <a:avLst/>
@@ -6633,79 +7621,104 @@
                 <a:ea typeface="Cambria" pitchFamily="34" charset="-122"/>
                 <a:cs typeface="Cambria" pitchFamily="34" charset="-120"/>
               </a:rPr>
-              <a:t>Seleção</a:t>
-            </a:r>
-            <a:pPr indent="0" marL="0">
-              <a:buNone/>
-            </a:pPr>
-            <a:r>
-              <a:rPr lang="en-US" sz="1350" dirty="0">
+              <a:t>Formalizar</a:t>
+            </a:r>
+            <a:endParaRPr lang="en-US" sz="1700" dirty="0"/>
+          </a:p>
+        </p:txBody>
+      </p:sp>
+      <p:sp>
+        <p:nvSpPr>
+          <p:cNvPr id="9" name="Text 7"/>
+          <p:cNvSpPr txBox="1"/>
+          <p:nvPr/>
+        </p:nvSpPr>
+        <p:spPr>
+          <a:xfrm>
+            <a:off x="923544" y="3621024"/>
+            <a:ext cx="2972714" cy="475488"/>
+          </a:xfrm>
+          <a:prstGeom prst="rect">
+            <a:avLst/>
+          </a:prstGeom>
+          <a:noFill/>
+          <a:ln/>
+        </p:spPr>
+        <p:txBody>
+          <a:bodyPr wrap="square" lIns="0" tIns="0" rIns="0" bIns="0" rtlCol="0" anchor="ctr"/>
+          <a:lstStyle/>
+          <a:p>
+            <a:pPr indent="0" marL="0">
+              <a:lnSpc>
+                <a:spcPts val="1700"/>
+              </a:lnSpc>
+              <a:buNone/>
+            </a:pPr>
+            <a:r>
+              <a:rPr lang="en-US" sz="1400" b="1" dirty="0">
+                <a:solidFill>
+                  <a:srgbClr val="33291F"/>
+                </a:solidFill>
+              </a:rPr>
+              <a:t>A norma em domínio PDDL</a:t>
+            </a:r>
+            <a:endParaRPr lang="en-US" sz="1400" dirty="0"/>
+          </a:p>
+        </p:txBody>
+      </p:sp>
+      <p:sp>
+        <p:nvSpPr>
+          <p:cNvPr id="10" name="Text 8"/>
+          <p:cNvSpPr txBox="1"/>
+          <p:nvPr/>
+        </p:nvSpPr>
+        <p:spPr>
+          <a:xfrm>
+            <a:off x="923544" y="4151376"/>
+            <a:ext cx="2972714" cy="713232"/>
+          </a:xfrm>
+          <a:prstGeom prst="rect">
+            <a:avLst/>
+          </a:prstGeom>
+          <a:noFill/>
+          <a:ln/>
+        </p:spPr>
+        <p:txBody>
+          <a:bodyPr wrap="square" lIns="0" tIns="0" rIns="0" bIns="0" rtlCol="0" anchor="ctr"/>
+          <a:lstStyle/>
+          <a:p>
+            <a:pPr indent="0" marL="0">
+              <a:lnSpc>
+                <a:spcPts val="1550"/>
+              </a:lnSpc>
+              <a:buNone/>
+            </a:pPr>
+            <a:r>
+              <a:rPr lang="en-US" sz="1250" dirty="0">
                 <a:solidFill>
                   <a:srgbClr val="5C4F41"/>
                 </a:solidFill>
-                <a:latin typeface="Cambria" pitchFamily="34" charset="0"/>
-                <a:ea typeface="Cambria" pitchFamily="34" charset="-122"/>
-                <a:cs typeface="Cambria" pitchFamily="34" charset="-120"/>
-              </a:rPr>
-              <a:t>   quem entra no turno</a:t>
-            </a:r>
-            <a:endParaRPr lang="en-US" sz="1700" dirty="0"/>
-          </a:p>
-        </p:txBody>
-      </p:sp>
-      <p:sp>
-        <p:nvSpPr>
-          <p:cNvPr id="8" name="Text 6"/>
-          <p:cNvSpPr txBox="1"/>
-          <p:nvPr/>
-        </p:nvSpPr>
-        <p:spPr>
-          <a:xfrm>
-            <a:off x="1554480" y="2295144"/>
-            <a:ext cx="9418320" cy="384048"/>
-          </a:xfrm>
-          <a:prstGeom prst="rect">
-            <a:avLst/>
-          </a:prstGeom>
-          <a:noFill/>
-          <a:ln/>
-        </p:spPr>
-        <p:txBody>
-          <a:bodyPr wrap="square" lIns="0" tIns="0" rIns="0" bIns="0" rtlCol="0" anchor="ctr"/>
-          <a:lstStyle/>
-          <a:p>
-            <a:pPr indent="0" marL="0">
-              <a:lnSpc>
-                <a:spcPts val="1600"/>
-              </a:lnSpc>
-              <a:buNone/>
-            </a:pPr>
-            <a:r>
-              <a:rPr lang="en-US" sz="1300" dirty="0">
-                <a:solidFill>
-                  <a:srgbClr val="5C4F41"/>
-                </a:solidFill>
-              </a:rPr>
-              <a:t>Prioridade clínica e atraso em relação ao intervalo máximo, sob orçamento de tempo.</a:t>
-            </a:r>
-            <a:endParaRPr lang="en-US" sz="1300" dirty="0"/>
-          </a:p>
-        </p:txBody>
-      </p:sp>
-      <p:sp>
-        <p:nvSpPr>
-          <p:cNvPr id="9" name="camada2"/>
+              </a:rPr>
+              <a:t>Traduzir os §§ 3º e 4º do art. 3º da Lei 11.350/2006 e as diretrizes da PNAB em ações, pré-condições e efeitos.</a:t>
+            </a:r>
+            <a:endParaRPr lang="en-US" sz="1250" dirty="0"/>
+          </a:p>
+        </p:txBody>
+      </p:sp>
+      <p:sp>
+        <p:nvSpPr>
+          <p:cNvPr id="11" name="obj1"/>
           <p:cNvSpPr/>
           <p:nvPr/>
         </p:nvSpPr>
         <p:spPr>
           <a:xfrm>
-            <a:off x="685800" y="2880360"/>
-            <a:ext cx="10820095" cy="987552"/>
+            <a:off x="4371746" y="3090672"/>
+            <a:ext cx="3448202" cy="1920240"/>
           </a:xfrm>
           <a:prstGeom prst="roundRect">
             <a:avLst>
-              <a:gd name="adj" fmla="val 7407"/>
+              <a:gd name="adj" fmla="val 4762"/>
             </a:avLst>
           </a:prstGeom>
           <a:solidFill>
@@ -6728,70 +7741,14 @@
       </p:sp>
       <p:sp>
         <p:nvSpPr>
-          <p:cNvPr id="10" name="num2"/>
-          <p:cNvSpPr/>
-          <p:nvPr/>
-        </p:nvSpPr>
-        <p:spPr>
-          <a:xfrm>
-            <a:off x="941832" y="3154680"/>
-            <a:ext cx="438912" cy="438912"/>
-          </a:xfrm>
-          <a:prstGeom prst="ellipse">
-            <a:avLst/>
-          </a:prstGeom>
-          <a:solidFill>
-            <a:srgbClr val="B35C38"/>
-          </a:solidFill>
-          <a:ln/>
-        </p:spPr>
-      </p:sp>
-      <p:sp>
-        <p:nvSpPr>
-          <p:cNvPr id="11" name="Text 9"/>
-          <p:cNvSpPr txBox="1"/>
-          <p:nvPr/>
-        </p:nvSpPr>
-        <p:spPr>
-          <a:xfrm>
-            <a:off x="941832" y="3154680"/>
-            <a:ext cx="438912" cy="438912"/>
-          </a:xfrm>
-          <a:prstGeom prst="rect">
-            <a:avLst/>
-          </a:prstGeom>
-          <a:noFill/>
-          <a:ln/>
-        </p:spPr>
-        <p:txBody>
-          <a:bodyPr wrap="square" lIns="0" tIns="0" rIns="0" bIns="0" rtlCol="0" anchor="ctr"/>
-          <a:lstStyle/>
-          <a:p>
-            <a:pPr algn="ctr" indent="0" marL="0">
-              <a:buNone/>
-            </a:pPr>
-            <a:r>
-              <a:rPr lang="en-US" sz="1500" b="1" dirty="0">
-                <a:solidFill>
-                  <a:srgbClr val="FFFFFF"/>
-                </a:solidFill>
-              </a:rPr>
-              <a:t>2</a:t>
-            </a:r>
-            <a:endParaRPr lang="en-US" sz="1500" dirty="0"/>
-          </a:p>
-        </p:txBody>
-      </p:sp>
-      <p:sp>
-        <p:nvSpPr>
           <p:cNvPr id="12" name="Text 10"/>
           <p:cNvSpPr txBox="1"/>
           <p:nvPr/>
         </p:nvSpPr>
         <p:spPr>
           <a:xfrm>
-            <a:off x="1554480" y="3035808"/>
-            <a:ext cx="3931920" cy="347472"/>
+            <a:off x="4609490" y="3273552"/>
+            <a:ext cx="2972714" cy="310896"/>
           </a:xfrm>
           <a:prstGeom prst="rect">
             <a:avLst/>
@@ -6815,79 +7772,104 @@
                 <a:ea typeface="Cambria" pitchFamily="34" charset="-122"/>
                 <a:cs typeface="Cambria" pitchFamily="34" charset="-120"/>
               </a:rPr>
-              <a:t>Roteamento</a:t>
-            </a:r>
-            <a:pPr indent="0" marL="0">
-              <a:buNone/>
-            </a:pPr>
-            <a:r>
-              <a:rPr lang="en-US" sz="1350" dirty="0">
+              <a:t>Construir</a:t>
+            </a:r>
+            <a:endParaRPr lang="en-US" sz="1700" dirty="0"/>
+          </a:p>
+        </p:txBody>
+      </p:sp>
+      <p:sp>
+        <p:nvSpPr>
+          <p:cNvPr id="13" name="Text 11"/>
+          <p:cNvSpPr txBox="1"/>
+          <p:nvPr/>
+        </p:nvSpPr>
+        <p:spPr>
+          <a:xfrm>
+            <a:off x="4609490" y="3621024"/>
+            <a:ext cx="2972714" cy="475488"/>
+          </a:xfrm>
+          <a:prstGeom prst="rect">
+            <a:avLst/>
+          </a:prstGeom>
+          <a:noFill/>
+          <a:ln/>
+        </p:spPr>
+        <p:txBody>
+          <a:bodyPr wrap="square" lIns="0" tIns="0" rIns="0" bIns="0" rtlCol="0" anchor="ctr"/>
+          <a:lstStyle/>
+          <a:p>
+            <a:pPr indent="0" marL="0">
+              <a:lnSpc>
+                <a:spcPts val="1700"/>
+              </a:lnSpc>
+              <a:buNone/>
+            </a:pPr>
+            <a:r>
+              <a:rPr lang="en-US" sz="1400" b="1" dirty="0">
+                <a:solidFill>
+                  <a:srgbClr val="33291F"/>
+                </a:solidFill>
+              </a:rPr>
+              <a:t>O sistema e o ambiente de medição</a:t>
+            </a:r>
+            <a:endParaRPr lang="en-US" sz="1400" dirty="0"/>
+          </a:p>
+        </p:txBody>
+      </p:sp>
+      <p:sp>
+        <p:nvSpPr>
+          <p:cNvPr id="14" name="Text 12"/>
+          <p:cNvSpPr txBox="1"/>
+          <p:nvPr/>
+        </p:nvSpPr>
+        <p:spPr>
+          <a:xfrm>
+            <a:off x="4609490" y="4151376"/>
+            <a:ext cx="2972714" cy="713232"/>
+          </a:xfrm>
+          <a:prstGeom prst="rect">
+            <a:avLst/>
+          </a:prstGeom>
+          <a:noFill/>
+          <a:ln/>
+        </p:spPr>
+        <p:txBody>
+          <a:bodyPr wrap="square" lIns="0" tIns="0" rIns="0" bIns="0" rtlCol="0" anchor="ctr"/>
+          <a:lstStyle/>
+          <a:p>
+            <a:pPr indent="0" marL="0">
+              <a:lnSpc>
+                <a:spcPts val="1550"/>
+              </a:lnSpc>
+              <a:buNone/>
+            </a:pPr>
+            <a:r>
+              <a:rPr lang="en-US" sz="1250" dirty="0">
                 <a:solidFill>
                   <a:srgbClr val="5C4F41"/>
                 </a:solidFill>
-                <a:latin typeface="Cambria" pitchFamily="34" charset="0"/>
-                <a:ea typeface="Cambria" pitchFamily="34" charset="-122"/>
-                <a:cs typeface="Cambria" pitchFamily="34" charset="-120"/>
-              </a:rPr>
-              <a:t>   em que ordem visitar</a:t>
-            </a:r>
-            <a:endParaRPr lang="en-US" sz="1700" dirty="0"/>
-          </a:p>
-        </p:txBody>
-      </p:sp>
-      <p:sp>
-        <p:nvSpPr>
-          <p:cNvPr id="13" name="Text 11"/>
-          <p:cNvSpPr txBox="1"/>
-          <p:nvPr/>
-        </p:nvSpPr>
-        <p:spPr>
-          <a:xfrm>
-            <a:off x="1554480" y="3392424"/>
-            <a:ext cx="9418320" cy="384048"/>
-          </a:xfrm>
-          <a:prstGeom prst="rect">
-            <a:avLst/>
-          </a:prstGeom>
-          <a:noFill/>
-          <a:ln/>
-        </p:spPr>
-        <p:txBody>
-          <a:bodyPr wrap="square" lIns="0" tIns="0" rIns="0" bIns="0" rtlCol="0" anchor="ctr"/>
-          <a:lstStyle/>
-          <a:p>
-            <a:pPr indent="0" marL="0">
-              <a:lnSpc>
-                <a:spcPts val="1600"/>
-              </a:lnSpc>
-              <a:buNone/>
-            </a:pPr>
-            <a:r>
-              <a:rPr lang="en-US" sz="1300" dirty="0">
-                <a:solidFill>
-                  <a:srgbClr val="5C4F41"/>
-                </a:solidFill>
-              </a:rPr>
-              <a:t>Heurística de grafos sobre a matriz de distâncias. Entrega a rota e o custo de desviar até a unidade.</a:t>
-            </a:r>
-            <a:endParaRPr lang="en-US" sz="1300" dirty="0"/>
-          </a:p>
-        </p:txBody>
-      </p:sp>
-      <p:sp>
-        <p:nvSpPr>
-          <p:cNvPr id="14" name="camada3"/>
+              </a:rPr>
+              <a:t>A camada geométrica, o tradutor para PDDL, o executor procedural de referência e a saída legível pelo agente.</a:t>
+            </a:r>
+            <a:endParaRPr lang="en-US" sz="1250" dirty="0"/>
+          </a:p>
+        </p:txBody>
+      </p:sp>
+      <p:sp>
+        <p:nvSpPr>
+          <p:cNvPr id="15" name="obj2"/>
           <p:cNvSpPr/>
           <p:nvPr/>
         </p:nvSpPr>
         <p:spPr>
           <a:xfrm>
-            <a:off x="685800" y="3977640"/>
-            <a:ext cx="10820095" cy="987552"/>
+            <a:off x="8057693" y="3090672"/>
+            <a:ext cx="3448202" cy="1920240"/>
           </a:xfrm>
           <a:prstGeom prst="roundRect">
             <a:avLst>
-              <a:gd name="adj" fmla="val 7407"/>
+              <a:gd name="adj" fmla="val 4762"/>
             </a:avLst>
           </a:prstGeom>
           <a:solidFill>
@@ -6910,70 +7892,14 @@
       </p:sp>
       <p:sp>
         <p:nvSpPr>
-          <p:cNvPr id="15" name="num3"/>
-          <p:cNvSpPr/>
-          <p:nvPr/>
-        </p:nvSpPr>
-        <p:spPr>
-          <a:xfrm>
-            <a:off x="941832" y="4251960"/>
-            <a:ext cx="438912" cy="438912"/>
-          </a:xfrm>
-          <a:prstGeom prst="ellipse">
-            <a:avLst/>
-          </a:prstGeom>
-          <a:solidFill>
-            <a:srgbClr val="4A6B5B"/>
-          </a:solidFill>
-          <a:ln/>
-        </p:spPr>
-      </p:sp>
-      <p:sp>
-        <p:nvSpPr>
           <p:cNvPr id="16" name="Text 14"/>
           <p:cNvSpPr txBox="1"/>
           <p:nvPr/>
         </p:nvSpPr>
         <p:spPr>
           <a:xfrm>
-            <a:off x="941832" y="4251960"/>
-            <a:ext cx="438912" cy="438912"/>
-          </a:xfrm>
-          <a:prstGeom prst="rect">
-            <a:avLst/>
-          </a:prstGeom>
-          <a:noFill/>
-          <a:ln/>
-        </p:spPr>
-        <p:txBody>
-          <a:bodyPr wrap="square" lIns="0" tIns="0" rIns="0" bIns="0" rtlCol="0" anchor="ctr"/>
-          <a:lstStyle/>
-          <a:p>
-            <a:pPr algn="ctr" indent="0" marL="0">
-              <a:buNone/>
-            </a:pPr>
-            <a:r>
-              <a:rPr lang="en-US" sz="1500" b="1" dirty="0">
-                <a:solidFill>
-                  <a:srgbClr val="FFFFFF"/>
-                </a:solidFill>
-              </a:rPr>
-              <a:t>3</a:t>
-            </a:r>
-            <a:endParaRPr lang="en-US" sz="1500" dirty="0"/>
-          </a:p>
-        </p:txBody>
-      </p:sp>
-      <p:sp>
-        <p:nvSpPr>
-          <p:cNvPr id="17" name="Text 15"/>
-          <p:cNvSpPr txBox="1"/>
-          <p:nvPr/>
-        </p:nvSpPr>
-        <p:spPr>
-          <a:xfrm>
-            <a:off x="1554480" y="4133088"/>
-            <a:ext cx="3931920" cy="347472"/>
+            <a:off x="8295437" y="3273552"/>
+            <a:ext cx="2972714" cy="310896"/>
           </a:xfrm>
           <a:prstGeom prst="rect">
             <a:avLst/>
@@ -6997,126 +7923,129 @@
                 <a:ea typeface="Cambria" pitchFamily="34" charset="-122"/>
                 <a:cs typeface="Cambria" pitchFamily="34" charset="-120"/>
               </a:rPr>
-              <a:t>Planejamento</a:t>
-            </a:r>
-            <a:pPr indent="0" marL="0">
-              <a:buNone/>
-            </a:pPr>
-            <a:r>
-              <a:rPr lang="en-US" sz="1350" dirty="0">
+              <a:t>Validar</a:t>
+            </a:r>
+            <a:endParaRPr lang="en-US" sz="1700" dirty="0"/>
+          </a:p>
+        </p:txBody>
+      </p:sp>
+      <p:sp>
+        <p:nvSpPr>
+          <p:cNvPr id="17" name="Text 15"/>
+          <p:cNvSpPr txBox="1"/>
+          <p:nvPr/>
+        </p:nvSpPr>
+        <p:spPr>
+          <a:xfrm>
+            <a:off x="8295437" y="3621024"/>
+            <a:ext cx="2972714" cy="475488"/>
+          </a:xfrm>
+          <a:prstGeom prst="rect">
+            <a:avLst/>
+          </a:prstGeom>
+          <a:noFill/>
+          <a:ln/>
+        </p:spPr>
+        <p:txBody>
+          <a:bodyPr wrap="square" lIns="0" tIns="0" rIns="0" bIns="0" rtlCol="0" anchor="ctr"/>
+          <a:lstStyle/>
+          <a:p>
+            <a:pPr indent="0" marL="0">
+              <a:lnSpc>
+                <a:spcPts val="1700"/>
+              </a:lnSpc>
+              <a:buNone/>
+            </a:pPr>
+            <a:r>
+              <a:rPr lang="en-US" sz="1400" b="1" dirty="0">
+                <a:solidFill>
+                  <a:srgbClr val="33291F"/>
+                </a:solidFill>
+              </a:rPr>
+              <a:t>Os experimentos e a independência</a:t>
+            </a:r>
+            <a:endParaRPr lang="en-US" sz="1400" dirty="0"/>
+          </a:p>
+        </p:txBody>
+      </p:sp>
+      <p:sp>
+        <p:nvSpPr>
+          <p:cNvPr id="18" name="Text 16"/>
+          <p:cNvSpPr txBox="1"/>
+          <p:nvPr/>
+        </p:nvSpPr>
+        <p:spPr>
+          <a:xfrm>
+            <a:off x="8295437" y="4151376"/>
+            <a:ext cx="2972714" cy="713232"/>
+          </a:xfrm>
+          <a:prstGeom prst="rect">
+            <a:avLst/>
+          </a:prstGeom>
+          <a:noFill/>
+          <a:ln/>
+        </p:spPr>
+        <p:txBody>
+          <a:bodyPr wrap="square" lIns="0" tIns="0" rIns="0" bIns="0" rtlCol="0" anchor="ctr"/>
+          <a:lstStyle/>
+          <a:p>
+            <a:pPr indent="0" marL="0">
+              <a:lnSpc>
+                <a:spcPts val="1550"/>
+              </a:lnSpc>
+              <a:buNone/>
+            </a:pPr>
+            <a:r>
+              <a:rPr lang="en-US" sz="1250" dirty="0">
                 <a:solidFill>
                   <a:srgbClr val="5C4F41"/>
+                </a:solidFill>
+              </a:rPr>
+              <a:t>Escalabilidade, qualidade de plano e reconhecimento de inviabilidade, com conferência em planejador de referência.</a:t>
+            </a:r>
+            <a:endParaRPr lang="en-US" sz="1250" dirty="0"/>
+          </a:p>
+        </p:txBody>
+      </p:sp>
+      <p:sp>
+        <p:nvSpPr>
+          <p:cNvPr id="19" name="Text 17"/>
+          <p:cNvSpPr txBox="1"/>
+          <p:nvPr/>
+        </p:nvSpPr>
+        <p:spPr>
+          <a:xfrm>
+            <a:off x="685800" y="5212080"/>
+            <a:ext cx="10820095" cy="548640"/>
+          </a:xfrm>
+          <a:prstGeom prst="rect">
+            <a:avLst/>
+          </a:prstGeom>
+          <a:noFill/>
+          <a:ln/>
+        </p:spPr>
+        <p:txBody>
+          <a:bodyPr wrap="square" lIns="0" tIns="0" rIns="0" bIns="0" rtlCol="0" anchor="ctr"/>
+          <a:lstStyle/>
+          <a:p>
+            <a:pPr indent="0" marL="0">
+              <a:lnSpc>
+                <a:spcPts val="2100"/>
+              </a:lnSpc>
+              <a:buNone/>
+            </a:pPr>
+            <a:r>
+              <a:rPr lang="en-US" sz="1700" b="1" dirty="0">
+                <a:solidFill>
+                  <a:srgbClr val="33291F"/>
                 </a:solidFill>
                 <a:latin typeface="Cambria" pitchFamily="34" charset="0"/>
                 <a:ea typeface="Cambria" pitchFamily="34" charset="-122"/>
                 <a:cs typeface="Cambria" pitchFamily="34" charset="-120"/>
               </a:rPr>
-              <a:t>   o que fazer em cada parada</a:t>
+              <a:t>Os sete objetivos específicos cabem nesses três verbos, e a ordem entre eles é a ordem do trabalho.</a:t>
             </a:r>
             <a:endParaRPr lang="en-US" sz="1700" dirty="0"/>
-          </a:p>
-        </p:txBody>
-      </p:sp>
-      <p:sp>
-        <p:nvSpPr>
-          <p:cNvPr id="18" name="Text 16"/>
-          <p:cNvSpPr txBox="1"/>
-          <p:nvPr/>
-        </p:nvSpPr>
-        <p:spPr>
-          <a:xfrm>
-            <a:off x="1554480" y="4489704"/>
-            <a:ext cx="9418320" cy="384048"/>
-          </a:xfrm>
-          <a:prstGeom prst="rect">
-            <a:avLst/>
-          </a:prstGeom>
-          <a:noFill/>
-          <a:ln/>
-        </p:spPr>
-        <p:txBody>
-          <a:bodyPr wrap="square" lIns="0" tIns="0" rIns="0" bIns="0" rtlCol="0" anchor="ctr"/>
-          <a:lstStyle/>
-          <a:p>
-            <a:pPr indent="0" marL="0">
-              <a:lnSpc>
-                <a:spcPts val="1600"/>
-              </a:lnSpc>
-              <a:buNone/>
-            </a:pPr>
-            <a:r>
-              <a:rPr lang="en-US" sz="1300" dirty="0">
-                <a:solidFill>
-                  <a:srgbClr val="5C4F41"/>
-                </a:solidFill>
-              </a:rPr>
-              <a:t>Domínio PDDL com as condições legais e os recursos finitos. Decide as ações e os desvios de reposição.</a:t>
-            </a:r>
-            <a:endParaRPr lang="en-US" sz="1300" dirty="0"/>
-          </a:p>
-        </p:txBody>
-      </p:sp>
-      <p:sp>
-        <p:nvSpPr>
-          <p:cNvPr id="19" name="fecho"/>
-          <p:cNvSpPr/>
-          <p:nvPr/>
-        </p:nvSpPr>
-        <p:spPr>
-          <a:xfrm>
-            <a:off x="685800" y="5120640"/>
-            <a:ext cx="10820095" cy="713232"/>
-          </a:xfrm>
-          <a:prstGeom prst="roundRect">
-            <a:avLst>
-              <a:gd name="adj" fmla="val 11538"/>
-            </a:avLst>
-          </a:prstGeom>
-          <a:solidFill>
-            <a:srgbClr val="DDE7E0"/>
-          </a:solidFill>
-          <a:ln/>
-        </p:spPr>
-      </p:sp>
-      <p:sp>
-        <p:nvSpPr>
-          <p:cNvPr id="20" name="Text 18"/>
-          <p:cNvSpPr txBox="1"/>
-          <p:nvPr/>
-        </p:nvSpPr>
-        <p:spPr>
-          <a:xfrm>
-            <a:off x="960120" y="5193792"/>
-            <a:ext cx="10271455" cy="566928"/>
-          </a:xfrm>
-          <a:prstGeom prst="rect">
-            <a:avLst/>
-          </a:prstGeom>
-          <a:noFill/>
-          <a:ln/>
-        </p:spPr>
-        <p:txBody>
-          <a:bodyPr wrap="square" lIns="0" tIns="0" rIns="0" bIns="0" rtlCol="0" anchor="ctr"/>
-          <a:lstStyle/>
-          <a:p>
-            <a:pPr indent="0" marL="0">
-              <a:lnSpc>
-                <a:spcPts val="1900"/>
-              </a:lnSpc>
-              <a:buNone/>
-            </a:pPr>
-            <a:r>
-              <a:rPr lang="en-US" sz="1550" i="1" dirty="0">
-                <a:solidFill>
-                  <a:srgbClr val="33291F"/>
-                </a:solidFill>
-                <a:latin typeface="Cambria" pitchFamily="34" charset="0"/>
-                <a:ea typeface="Cambria" pitchFamily="34" charset="-122"/>
-                <a:cs typeface="Cambria" pitchFamily="34" charset="-120"/>
-              </a:rPr>
-              <a:t>A camada 3 nunca escolhe a rota: ela só anda pelas arestas que a camada 2 autorizou. Por isso trocar o roteirizador não muda uma linha do domínio.</a:t>
-            </a:r>
-            <a:endParaRPr lang="en-US" sz="1550" dirty="0"/>
           </a:p>
         </p:txBody>
       </p:sp>
@@ -7220,7 +8149,7 @@
                   <a:srgbClr val="B35C38"/>
                 </a:solidFill>
               </a:rPr>
-              <a:t>PLANO DE VALIDAÇÃO</a:t>
+              <a:t>PROPOSTA DE ABORDAGEM</a:t>
             </a:r>
             <a:endParaRPr lang="en-US" sz="1100" dirty="0"/>
           </a:p>
@@ -7262,7 +8191,7 @@
                 <a:ea typeface="Cambria" pitchFamily="34" charset="-122"/>
                 <a:cs typeface="Cambria" pitchFamily="34" charset="-120"/>
               </a:rPr>
-              <a:t>Construímos o adversário antes de medir</a:t>
+              <a:t>Três camadas, cada paradigma no seu lugar</a:t>
             </a:r>
             <a:endParaRPr lang="en-US" sz="3400" dirty="0"/>
           </a:p>
@@ -7270,115 +8199,18 @@
       </p:sp>
       <p:sp>
         <p:nvSpPr>
-          <p:cNvPr id="4" name="controle"/>
+          <p:cNvPr id="4" name="camada1"/>
           <p:cNvSpPr/>
           <p:nvPr/>
         </p:nvSpPr>
         <p:spPr>
           <a:xfrm>
-            <a:off x="685800" y="1737360"/>
-            <a:ext cx="10820095" cy="1133856"/>
+            <a:off x="685800" y="1783080"/>
+            <a:ext cx="10820095" cy="987552"/>
           </a:xfrm>
           <a:prstGeom prst="roundRect">
             <a:avLst>
-              <a:gd name="adj" fmla="val 7258"/>
-            </a:avLst>
-          </a:prstGeom>
-          <a:solidFill>
-            <a:srgbClr val="DDE7E0"/>
-          </a:solidFill>
-          <a:ln/>
-        </p:spPr>
-      </p:sp>
-      <p:sp>
-        <p:nvSpPr>
-          <p:cNvPr id="5" name="Text 3"/>
-          <p:cNvSpPr txBox="1"/>
-          <p:nvPr/>
-        </p:nvSpPr>
-        <p:spPr>
-          <a:xfrm>
-            <a:off x="978408" y="1865376"/>
-            <a:ext cx="3657600" cy="274320"/>
-          </a:xfrm>
-          <a:prstGeom prst="rect">
-            <a:avLst/>
-          </a:prstGeom>
-          <a:noFill/>
-          <a:ln/>
-        </p:spPr>
-        <p:txBody>
-          <a:bodyPr wrap="square" lIns="0" tIns="0" rIns="0" bIns="0" rtlCol="0" anchor="ctr"/>
-          <a:lstStyle/>
-          <a:p>
-            <a:pPr indent="0" marL="0">
-              <a:buNone/>
-            </a:pPr>
-            <a:r>
-              <a:rPr lang="en-US" sz="1250" b="1" spc="100" kern="0" dirty="0">
-                <a:solidFill>
-                  <a:srgbClr val="4A6B5B"/>
-                </a:solidFill>
-              </a:rPr>
-              <a:t>Grupo de comparação</a:t>
-            </a:r>
-            <a:endParaRPr lang="en-US" sz="1250" dirty="0"/>
-          </a:p>
-        </p:txBody>
-      </p:sp>
-      <p:sp>
-        <p:nvSpPr>
-          <p:cNvPr id="6" name="Text 4"/>
-          <p:cNvSpPr txBox="1"/>
-          <p:nvPr/>
-        </p:nvSpPr>
-        <p:spPr>
-          <a:xfrm>
-            <a:off x="978408" y="2176272"/>
-            <a:ext cx="10234879" cy="621792"/>
-          </a:xfrm>
-          <a:prstGeom prst="rect">
-            <a:avLst/>
-          </a:prstGeom>
-          <a:noFill/>
-          <a:ln/>
-        </p:spPr>
-        <p:txBody>
-          <a:bodyPr wrap="square" lIns="0" tIns="0" rIns="0" bIns="0" rtlCol="0" anchor="ctr"/>
-          <a:lstStyle/>
-          <a:p>
-            <a:pPr indent="0" marL="0">
-              <a:lnSpc>
-                <a:spcPts val="1800"/>
-              </a:lnSpc>
-              <a:buNone/>
-            </a:pPr>
-            <a:r>
-              <a:rPr lang="en-US" sz="1400" dirty="0">
-                <a:solidFill>
-                  <a:srgbClr val="33291F"/>
-                </a:solidFill>
-              </a:rPr>
-              <a:t>Um executor procedural percorre a mesma rota, cumpre os mesmos protocolos e lê a mesma tabela de custos do arquivo PDDL. O que ele não faz é antecipar: só descobre que falta recurso no momento de usá-lo.</a:t>
-            </a:r>
-            <a:endParaRPr lang="en-US" sz="1400" dirty="0"/>
-          </a:p>
-        </p:txBody>
-      </p:sp>
-      <p:sp>
-        <p:nvSpPr>
-          <p:cNvPr id="7" name="exp0"/>
-          <p:cNvSpPr/>
-          <p:nvPr/>
-        </p:nvSpPr>
-        <p:spPr>
-          <a:xfrm>
-            <a:off x="685800" y="3035808"/>
-            <a:ext cx="3448202" cy="1975104"/>
-          </a:xfrm>
-          <a:prstGeom prst="roundRect">
-            <a:avLst>
-              <a:gd name="adj" fmla="val 4630"/>
+              <a:gd name="adj" fmla="val 7407"/>
             </a:avLst>
           </a:prstGeom>
           <a:solidFill>
@@ -7401,14 +8233,34 @@
       </p:sp>
       <p:sp>
         <p:nvSpPr>
-          <p:cNvPr id="8" name="Text 6"/>
-          <p:cNvSpPr txBox="1"/>
-          <p:nvPr/>
-        </p:nvSpPr>
-        <p:spPr>
-          <a:xfrm>
-            <a:off x="923544" y="3236976"/>
-            <a:ext cx="2972714" cy="274320"/>
+          <p:cNvPr id="5" name="num1"/>
+          <p:cNvSpPr/>
+          <p:nvPr/>
+        </p:nvSpPr>
+        <p:spPr>
+          <a:xfrm>
+            <a:off x="941832" y="2057400"/>
+            <a:ext cx="438912" cy="438912"/>
+          </a:xfrm>
+          <a:prstGeom prst="ellipse">
+            <a:avLst/>
+          </a:prstGeom>
+          <a:solidFill>
+            <a:srgbClr val="B35C38"/>
+          </a:solidFill>
+          <a:ln/>
+        </p:spPr>
+      </p:sp>
+      <p:sp>
+        <p:nvSpPr>
+          <p:cNvPr id="6" name="Text 4"/>
+          <p:cNvSpPr txBox="1"/>
+          <p:nvPr/>
+        </p:nvSpPr>
+        <p:spPr>
+          <a:xfrm>
+            <a:off x="941832" y="2057400"/>
+            <a:ext cx="438912" cy="438912"/>
           </a:xfrm>
           <a:prstGeom prst="rect">
             <a:avLst/>
@@ -7420,31 +8272,31 @@
           <a:bodyPr wrap="square" lIns="0" tIns="0" rIns="0" bIns="0" rtlCol="0" anchor="ctr"/>
           <a:lstStyle/>
           <a:p>
-            <a:pPr indent="0" marL="0">
-              <a:buNone/>
-            </a:pPr>
-            <a:r>
-              <a:rPr lang="en-US" sz="1250" b="1" spc="100" kern="0" dirty="0">
-                <a:solidFill>
-                  <a:srgbClr val="8A7A67"/>
-                </a:solidFill>
-              </a:rPr>
-              <a:t>EXPERIMENTO 1</a:t>
-            </a:r>
-            <a:endParaRPr lang="en-US" sz="1250" dirty="0"/>
-          </a:p>
-        </p:txBody>
-      </p:sp>
-      <p:sp>
-        <p:nvSpPr>
-          <p:cNvPr id="9" name="Text 7"/>
-          <p:cNvSpPr txBox="1"/>
-          <p:nvPr/>
-        </p:nvSpPr>
-        <p:spPr>
-          <a:xfrm>
-            <a:off x="923544" y="3566160"/>
-            <a:ext cx="2972714" cy="365760"/>
+            <a:pPr algn="ctr" indent="0" marL="0">
+              <a:buNone/>
+            </a:pPr>
+            <a:r>
+              <a:rPr lang="en-US" sz="1500" b="1" dirty="0">
+                <a:solidFill>
+                  <a:srgbClr val="FFFFFF"/>
+                </a:solidFill>
+              </a:rPr>
+              <a:t>1</a:t>
+            </a:r>
+            <a:endParaRPr lang="en-US" sz="1500" dirty="0"/>
+          </a:p>
+        </p:txBody>
+      </p:sp>
+      <p:sp>
+        <p:nvSpPr>
+          <p:cNvPr id="7" name="Text 5"/>
+          <p:cNvSpPr txBox="1"/>
+          <p:nvPr/>
+        </p:nvSpPr>
+        <p:spPr>
+          <a:xfrm>
+            <a:off x="1554480" y="1938528"/>
+            <a:ext cx="3931920" cy="347472"/>
           </a:xfrm>
           <a:prstGeom prst="rect">
             <a:avLst/>
@@ -7457,79 +8309,90 @@
           <a:lstStyle/>
           <a:p>
             <a:pPr indent="0" marL="0">
-              <a:lnSpc>
-                <a:spcPts val="2100"/>
-              </a:lnSpc>
-              <a:buNone/>
-            </a:pPr>
-            <a:r>
-              <a:rPr lang="en-US" sz="1500" b="1" dirty="0">
-                <a:solidFill>
-                  <a:srgbClr val="33291F"/>
+              <a:buNone/>
+            </a:pPr>
+            <a:r>
+              <a:rPr lang="en-US" sz="1700" b="1" dirty="0">
+                <a:solidFill>
+                  <a:srgbClr val="B35C38"/>
                 </a:solidFill>
                 <a:latin typeface="Cambria" pitchFamily="34" charset="0"/>
                 <a:ea typeface="Cambria" pitchFamily="34" charset="-122"/>
                 <a:cs typeface="Cambria" pitchFamily="34" charset="-120"/>
               </a:rPr>
-              <a:t>Escalabilidade</a:t>
-            </a:r>
-            <a:endParaRPr lang="en-US" sz="1500" dirty="0"/>
-          </a:p>
-        </p:txBody>
-      </p:sp>
-      <p:sp>
-        <p:nvSpPr>
-          <p:cNvPr id="10" name="Text 8"/>
-          <p:cNvSpPr txBox="1"/>
-          <p:nvPr/>
-        </p:nvSpPr>
-        <p:spPr>
-          <a:xfrm>
-            <a:off x="923544" y="4005072"/>
-            <a:ext cx="2972714" cy="841248"/>
-          </a:xfrm>
-          <a:prstGeom prst="rect">
-            <a:avLst/>
-          </a:prstGeom>
-          <a:noFill/>
-          <a:ln/>
-        </p:spPr>
-        <p:txBody>
-          <a:bodyPr wrap="square" lIns="0" tIns="0" rIns="0" bIns="0" rtlCol="0" anchor="t"/>
-          <a:lstStyle/>
-          <a:p>
-            <a:pPr indent="0" marL="0">
-              <a:lnSpc>
-                <a:spcPts val="1550"/>
-              </a:lnSpc>
-              <a:buNone/>
-            </a:pPr>
-            <a:r>
-              <a:rPr lang="en-US" sz="1250" dirty="0">
+              <a:t>Seleção</a:t>
+            </a:r>
+            <a:pPr indent="0" marL="0">
+              <a:buNone/>
+            </a:pPr>
+            <a:r>
+              <a:rPr lang="en-US" sz="1350" dirty="0">
                 <a:solidFill>
                   <a:srgbClr val="5C4F41"/>
                 </a:solidFill>
-              </a:rPr>
-              <a:t>Até que tamanho de microárea cada estratégia de busca ainda é viável.</a:t>
-            </a:r>
-            <a:endParaRPr lang="en-US" sz="1250" dirty="0"/>
-          </a:p>
-        </p:txBody>
-      </p:sp>
-      <p:sp>
-        <p:nvSpPr>
-          <p:cNvPr id="11" name="exp1"/>
+                <a:latin typeface="Cambria" pitchFamily="34" charset="0"/>
+                <a:ea typeface="Cambria" pitchFamily="34" charset="-122"/>
+                <a:cs typeface="Cambria" pitchFamily="34" charset="-120"/>
+              </a:rPr>
+              <a:t>   quem entra no turno</a:t>
+            </a:r>
+            <a:endParaRPr lang="en-US" sz="1700" dirty="0"/>
+          </a:p>
+        </p:txBody>
+      </p:sp>
+      <p:sp>
+        <p:nvSpPr>
+          <p:cNvPr id="8" name="Text 6"/>
+          <p:cNvSpPr txBox="1"/>
+          <p:nvPr/>
+        </p:nvSpPr>
+        <p:spPr>
+          <a:xfrm>
+            <a:off x="1554480" y="2295144"/>
+            <a:ext cx="9418320" cy="384048"/>
+          </a:xfrm>
+          <a:prstGeom prst="rect">
+            <a:avLst/>
+          </a:prstGeom>
+          <a:noFill/>
+          <a:ln/>
+        </p:spPr>
+        <p:txBody>
+          <a:bodyPr wrap="square" lIns="0" tIns="0" rIns="0" bIns="0" rtlCol="0" anchor="ctr"/>
+          <a:lstStyle/>
+          <a:p>
+            <a:pPr indent="0" marL="0">
+              <a:lnSpc>
+                <a:spcPts val="1600"/>
+              </a:lnSpc>
+              <a:buNone/>
+            </a:pPr>
+            <a:r>
+              <a:rPr lang="en-US" sz="1300" dirty="0">
+                <a:solidFill>
+                  <a:srgbClr val="5C4F41"/>
+                </a:solidFill>
+              </a:rPr>
+              <a:t>Prioridade clínica e atraso em relação ao intervalo máximo, sob orçamento de tempo.</a:t>
+            </a:r>
+            <a:endParaRPr lang="en-US" sz="1300" dirty="0"/>
+          </a:p>
+        </p:txBody>
+      </p:sp>
+      <p:sp>
+        <p:nvSpPr>
+          <p:cNvPr id="9" name="camada2"/>
           <p:cNvSpPr/>
           <p:nvPr/>
         </p:nvSpPr>
         <p:spPr>
           <a:xfrm>
-            <a:off x="4371746" y="3035808"/>
-            <a:ext cx="3448202" cy="1975104"/>
+            <a:off x="685800" y="2880360"/>
+            <a:ext cx="10820095" cy="987552"/>
           </a:xfrm>
           <a:prstGeom prst="roundRect">
             <a:avLst>
-              <a:gd name="adj" fmla="val 4630"/>
+              <a:gd name="adj" fmla="val 7407"/>
             </a:avLst>
           </a:prstGeom>
           <a:solidFill>
@@ -7552,14 +8415,70 @@
       </p:sp>
       <p:sp>
         <p:nvSpPr>
+          <p:cNvPr id="10" name="num2"/>
+          <p:cNvSpPr/>
+          <p:nvPr/>
+        </p:nvSpPr>
+        <p:spPr>
+          <a:xfrm>
+            <a:off x="941832" y="3154680"/>
+            <a:ext cx="438912" cy="438912"/>
+          </a:xfrm>
+          <a:prstGeom prst="ellipse">
+            <a:avLst/>
+          </a:prstGeom>
+          <a:solidFill>
+            <a:srgbClr val="B35C38"/>
+          </a:solidFill>
+          <a:ln/>
+        </p:spPr>
+      </p:sp>
+      <p:sp>
+        <p:nvSpPr>
+          <p:cNvPr id="11" name="Text 9"/>
+          <p:cNvSpPr txBox="1"/>
+          <p:nvPr/>
+        </p:nvSpPr>
+        <p:spPr>
+          <a:xfrm>
+            <a:off x="941832" y="3154680"/>
+            <a:ext cx="438912" cy="438912"/>
+          </a:xfrm>
+          <a:prstGeom prst="rect">
+            <a:avLst/>
+          </a:prstGeom>
+          <a:noFill/>
+          <a:ln/>
+        </p:spPr>
+        <p:txBody>
+          <a:bodyPr wrap="square" lIns="0" tIns="0" rIns="0" bIns="0" rtlCol="0" anchor="ctr"/>
+          <a:lstStyle/>
+          <a:p>
+            <a:pPr algn="ctr" indent="0" marL="0">
+              <a:buNone/>
+            </a:pPr>
+            <a:r>
+              <a:rPr lang="en-US" sz="1500" b="1" dirty="0">
+                <a:solidFill>
+                  <a:srgbClr val="FFFFFF"/>
+                </a:solidFill>
+              </a:rPr>
+              <a:t>2</a:t>
+            </a:r>
+            <a:endParaRPr lang="en-US" sz="1500" dirty="0"/>
+          </a:p>
+        </p:txBody>
+      </p:sp>
+      <p:sp>
+        <p:nvSpPr>
           <p:cNvPr id="12" name="Text 10"/>
           <p:cNvSpPr txBox="1"/>
           <p:nvPr/>
         </p:nvSpPr>
         <p:spPr>
           <a:xfrm>
-            <a:off x="4609490" y="3236976"/>
-            <a:ext cx="2972714" cy="274320"/>
+            <a:off x="1554480" y="3035808"/>
+            <a:ext cx="3931920" cy="347472"/>
           </a:xfrm>
           <a:prstGeom prst="rect">
             <a:avLst/>
@@ -7575,112 +8494,87 @@
               <a:buNone/>
             </a:pPr>
             <a:r>
-              <a:rPr lang="en-US" sz="1250" b="1" spc="100" kern="0" dirty="0">
-                <a:solidFill>
-                  <a:srgbClr val="8A7A67"/>
-                </a:solidFill>
-              </a:rPr>
-              <a:t>EXPERIMENTO 2</a:t>
-            </a:r>
-            <a:endParaRPr lang="en-US" sz="1250" dirty="0"/>
-          </a:p>
-        </p:txBody>
-      </p:sp>
-      <p:sp>
-        <p:nvSpPr>
-          <p:cNvPr id="13" name="Text 11"/>
-          <p:cNvSpPr txBox="1"/>
-          <p:nvPr/>
-        </p:nvSpPr>
-        <p:spPr>
-          <a:xfrm>
-            <a:off x="4609490" y="3566160"/>
-            <a:ext cx="2972714" cy="365760"/>
-          </a:xfrm>
-          <a:prstGeom prst="rect">
-            <a:avLst/>
-          </a:prstGeom>
-          <a:noFill/>
-          <a:ln/>
-        </p:spPr>
-        <p:txBody>
-          <a:bodyPr wrap="square" lIns="0" tIns="0" rIns="0" bIns="0" rtlCol="0" anchor="ctr"/>
-          <a:lstStyle/>
-          <a:p>
-            <a:pPr indent="0" marL="0">
-              <a:lnSpc>
-                <a:spcPts val="2100"/>
-              </a:lnSpc>
-              <a:buNone/>
-            </a:pPr>
-            <a:r>
-              <a:rPr lang="en-US" sz="1500" b="1" dirty="0">
-                <a:solidFill>
-                  <a:srgbClr val="33291F"/>
+              <a:rPr lang="en-US" sz="1700" b="1" dirty="0">
+                <a:solidFill>
+                  <a:srgbClr val="B35C38"/>
                 </a:solidFill>
                 <a:latin typeface="Cambria" pitchFamily="34" charset="0"/>
                 <a:ea typeface="Cambria" pitchFamily="34" charset="-122"/>
                 <a:cs typeface="Cambria" pitchFamily="34" charset="-120"/>
               </a:rPr>
-              <a:t>Falsos negativos</a:t>
-            </a:r>
-            <a:endParaRPr lang="en-US" sz="1500" dirty="0"/>
-          </a:p>
-        </p:txBody>
-      </p:sp>
-      <p:sp>
-        <p:nvSpPr>
-          <p:cNvPr id="14" name="Text 12"/>
-          <p:cNvSpPr txBox="1"/>
-          <p:nvPr/>
-        </p:nvSpPr>
-        <p:spPr>
-          <a:xfrm>
-            <a:off x="4609490" y="4005072"/>
-            <a:ext cx="2972714" cy="841248"/>
-          </a:xfrm>
-          <a:prstGeom prst="rect">
-            <a:avLst/>
-          </a:prstGeom>
-          <a:noFill/>
-          <a:ln/>
-        </p:spPr>
-        <p:txBody>
-          <a:bodyPr wrap="square" lIns="0" tIns="0" rIns="0" bIns="0" rtlCol="0" anchor="t"/>
-          <a:lstStyle/>
-          <a:p>
-            <a:pPr indent="0" marL="0">
-              <a:lnSpc>
-                <a:spcPts val="1550"/>
-              </a:lnSpc>
-              <a:buNone/>
-            </a:pPr>
-            <a:r>
-              <a:rPr lang="en-US" sz="1250" dirty="0">
+              <a:t>Roteamento</a:t>
+            </a:r>
+            <a:pPr indent="0" marL="0">
+              <a:buNone/>
+            </a:pPr>
+            <a:r>
+              <a:rPr lang="en-US" sz="1350" dirty="0">
                 <a:solidFill>
                   <a:srgbClr val="5C4F41"/>
                 </a:solidFill>
-              </a:rPr>
-              <a:t>Com que frequência cada abordagem declara inexequível um turno que tem solução.</a:t>
-            </a:r>
-            <a:endParaRPr lang="en-US" sz="1250" dirty="0"/>
-          </a:p>
-        </p:txBody>
-      </p:sp>
-      <p:sp>
-        <p:nvSpPr>
-          <p:cNvPr id="15" name="exp2"/>
+                <a:latin typeface="Cambria" pitchFamily="34" charset="0"/>
+                <a:ea typeface="Cambria" pitchFamily="34" charset="-122"/>
+                <a:cs typeface="Cambria" pitchFamily="34" charset="-120"/>
+              </a:rPr>
+              <a:t>   em que ordem visitar</a:t>
+            </a:r>
+            <a:endParaRPr lang="en-US" sz="1700" dirty="0"/>
+          </a:p>
+        </p:txBody>
+      </p:sp>
+      <p:sp>
+        <p:nvSpPr>
+          <p:cNvPr id="13" name="Text 11"/>
+          <p:cNvSpPr txBox="1"/>
+          <p:nvPr/>
+        </p:nvSpPr>
+        <p:spPr>
+          <a:xfrm>
+            <a:off x="1554480" y="3392424"/>
+            <a:ext cx="9418320" cy="384048"/>
+          </a:xfrm>
+          <a:prstGeom prst="rect">
+            <a:avLst/>
+          </a:prstGeom>
+          <a:noFill/>
+          <a:ln/>
+        </p:spPr>
+        <p:txBody>
+          <a:bodyPr wrap="square" lIns="0" tIns="0" rIns="0" bIns="0" rtlCol="0" anchor="ctr"/>
+          <a:lstStyle/>
+          <a:p>
+            <a:pPr indent="0" marL="0">
+              <a:lnSpc>
+                <a:spcPts val="1600"/>
+              </a:lnSpc>
+              <a:buNone/>
+            </a:pPr>
+            <a:r>
+              <a:rPr lang="en-US" sz="1300" dirty="0">
+                <a:solidFill>
+                  <a:srgbClr val="5C4F41"/>
+                </a:solidFill>
+              </a:rPr>
+              <a:t>Heurística de grafos sobre a matriz de distâncias. Entrega a rota e o custo de desviar até a unidade.</a:t>
+            </a:r>
+            <a:endParaRPr lang="en-US" sz="1300" dirty="0"/>
+          </a:p>
+        </p:txBody>
+      </p:sp>
+      <p:sp>
+        <p:nvSpPr>
+          <p:cNvPr id="14" name="camada3"/>
           <p:cNvSpPr/>
           <p:nvPr/>
         </p:nvSpPr>
         <p:spPr>
           <a:xfrm>
-            <a:off x="8057693" y="3035808"/>
-            <a:ext cx="3448202" cy="1975104"/>
+            <a:off x="685800" y="3977640"/>
+            <a:ext cx="10820095" cy="987552"/>
           </a:xfrm>
           <a:prstGeom prst="roundRect">
             <a:avLst>
-              <a:gd name="adj" fmla="val 4630"/>
+              <a:gd name="adj" fmla="val 7407"/>
             </a:avLst>
           </a:prstGeom>
           <a:solidFill>
@@ -7703,14 +8597,34 @@
       </p:sp>
       <p:sp>
         <p:nvSpPr>
+          <p:cNvPr id="15" name="num3"/>
+          <p:cNvSpPr/>
+          <p:nvPr/>
+        </p:nvSpPr>
+        <p:spPr>
+          <a:xfrm>
+            <a:off x="941832" y="4251960"/>
+            <a:ext cx="438912" cy="438912"/>
+          </a:xfrm>
+          <a:prstGeom prst="ellipse">
+            <a:avLst/>
+          </a:prstGeom>
+          <a:solidFill>
+            <a:srgbClr val="4A6B5B"/>
+          </a:solidFill>
+          <a:ln/>
+        </p:spPr>
+      </p:sp>
+      <p:sp>
+        <p:nvSpPr>
           <p:cNvPr id="16" name="Text 14"/>
           <p:cNvSpPr txBox="1"/>
           <p:nvPr/>
         </p:nvSpPr>
         <p:spPr>
           <a:xfrm>
-            <a:off x="8295437" y="3236976"/>
-            <a:ext cx="2972714" cy="274320"/>
+            <a:off x="941832" y="4251960"/>
+            <a:ext cx="438912" cy="438912"/>
           </a:xfrm>
           <a:prstGeom prst="rect">
             <a:avLst/>
@@ -7722,18 +8636,18 @@
           <a:bodyPr wrap="square" lIns="0" tIns="0" rIns="0" bIns="0" rtlCol="0" anchor="ctr"/>
           <a:lstStyle/>
           <a:p>
-            <a:pPr indent="0" marL="0">
-              <a:buNone/>
-            </a:pPr>
-            <a:r>
-              <a:rPr lang="en-US" sz="1250" b="1" spc="100" kern="0" dirty="0">
-                <a:solidFill>
-                  <a:srgbClr val="8A7A67"/>
-                </a:solidFill>
-              </a:rPr>
-              <a:t>EXPERIMENTO 3</a:t>
-            </a:r>
-            <a:endParaRPr lang="en-US" sz="1250" dirty="0"/>
+            <a:pPr algn="ctr" indent="0" marL="0">
+              <a:buNone/>
+            </a:pPr>
+            <a:r>
+              <a:rPr lang="en-US" sz="1500" b="1" dirty="0">
+                <a:solidFill>
+                  <a:srgbClr val="FFFFFF"/>
+                </a:solidFill>
+              </a:rPr>
+              <a:t>3</a:t>
+            </a:r>
+            <a:endParaRPr lang="en-US" sz="1500" dirty="0"/>
           </a:p>
         </p:txBody>
       </p:sp>
@@ -7745,8 +8659,8 @@
         </p:nvSpPr>
         <p:spPr>
           <a:xfrm>
-            <a:off x="8295437" y="3566160"/>
-            <a:ext cx="2972714" cy="365760"/>
+            <a:off x="1554480" y="4133088"/>
+            <a:ext cx="3931920" cy="347472"/>
           </a:xfrm>
           <a:prstGeom prst="rect">
             <a:avLst/>
@@ -7759,104 +8673,137 @@
           <a:lstStyle/>
           <a:p>
             <a:pPr indent="0" marL="0">
-              <a:lnSpc>
-                <a:spcPts val="2100"/>
-              </a:lnSpc>
-              <a:buNone/>
-            </a:pPr>
-            <a:r>
-              <a:rPr lang="en-US" sz="1500" b="1" dirty="0">
-                <a:solidFill>
-                  <a:srgbClr val="33291F"/>
+              <a:buNone/>
+            </a:pPr>
+            <a:r>
+              <a:rPr lang="en-US" sz="1700" b="1" dirty="0">
+                <a:solidFill>
+                  <a:srgbClr val="4A6B5B"/>
                 </a:solidFill>
                 <a:latin typeface="Cambria" pitchFamily="34" charset="0"/>
                 <a:ea typeface="Cambria" pitchFamily="34" charset="-122"/>
                 <a:cs typeface="Cambria" pitchFamily="34" charset="-120"/>
               </a:rPr>
-              <a:t>Prova de inviabilidade</a:t>
-            </a:r>
-            <a:endParaRPr lang="en-US" sz="1500" dirty="0"/>
-          </a:p>
-        </p:txBody>
-      </p:sp>
-      <p:sp>
-        <p:nvSpPr>
-          <p:cNvPr id="18" name="Text 16"/>
-          <p:cNvSpPr txBox="1"/>
-          <p:nvPr/>
-        </p:nvSpPr>
-        <p:spPr>
-          <a:xfrm>
-            <a:off x="8295437" y="4005072"/>
-            <a:ext cx="2972714" cy="841248"/>
-          </a:xfrm>
-          <a:prstGeom prst="rect">
-            <a:avLst/>
-          </a:prstGeom>
-          <a:noFill/>
-          <a:ln/>
-        </p:spPr>
-        <p:txBody>
-          <a:bodyPr wrap="square" lIns="0" tIns="0" rIns="0" bIns="0" rtlCol="0" anchor="t"/>
-          <a:lstStyle/>
-          <a:p>
-            <a:pPr indent="0" marL="0">
-              <a:lnSpc>
-                <a:spcPts val="1550"/>
-              </a:lnSpc>
-              <a:buNone/>
-            </a:pPr>
-            <a:r>
-              <a:rPr lang="en-US" sz="1250" dirty="0">
+              <a:t>Planejamento</a:t>
+            </a:r>
+            <a:pPr indent="0" marL="0">
+              <a:buNone/>
+            </a:pPr>
+            <a:r>
+              <a:rPr lang="en-US" sz="1350" dirty="0">
                 <a:solidFill>
                   <a:srgbClr val="5C4F41"/>
-                </a:solidFill>
-              </a:rPr>
-              <a:t>Instâncias sem solução, de dois tipos: falta condição legal, ou falta recurso.</a:t>
-            </a:r>
-            <a:endParaRPr lang="en-US" sz="1250" dirty="0"/>
-          </a:p>
-        </p:txBody>
-      </p:sp>
-      <p:sp>
-        <p:nvSpPr>
-          <p:cNvPr id="19" name="Text 17"/>
-          <p:cNvSpPr txBox="1"/>
-          <p:nvPr/>
-        </p:nvSpPr>
-        <p:spPr>
-          <a:xfrm>
-            <a:off x="685800" y="5138928"/>
-            <a:ext cx="10820095" cy="548640"/>
-          </a:xfrm>
-          <a:prstGeom prst="rect">
-            <a:avLst/>
-          </a:prstGeom>
-          <a:noFill/>
-          <a:ln/>
-        </p:spPr>
-        <p:txBody>
-          <a:bodyPr wrap="square" lIns="0" tIns="0" rIns="0" bIns="0" rtlCol="0" anchor="ctr"/>
-          <a:lstStyle/>
-          <a:p>
-            <a:pPr indent="0" marL="0">
-              <a:lnSpc>
-                <a:spcPts val="2100"/>
-              </a:lnSpc>
-              <a:buNone/>
-            </a:pPr>
-            <a:r>
-              <a:rPr lang="en-US" sz="1700" b="1" dirty="0">
-                <a:solidFill>
-                  <a:srgbClr val="33291F"/>
                 </a:solidFill>
                 <a:latin typeface="Cambria" pitchFamily="34" charset="0"/>
                 <a:ea typeface="Cambria" pitchFamily="34" charset="-122"/>
                 <a:cs typeface="Cambria" pitchFamily="34" charset="-120"/>
               </a:rPr>
-              <a:t>A variável isolada é uma só: a capacidade de antecipar conflitos de recursos.</a:t>
+              <a:t>   o que fazer em cada parada</a:t>
             </a:r>
             <a:endParaRPr lang="en-US" sz="1700" dirty="0"/>
+          </a:p>
+        </p:txBody>
+      </p:sp>
+      <p:sp>
+        <p:nvSpPr>
+          <p:cNvPr id="18" name="Text 16"/>
+          <p:cNvSpPr txBox="1"/>
+          <p:nvPr/>
+        </p:nvSpPr>
+        <p:spPr>
+          <a:xfrm>
+            <a:off x="1554480" y="4489704"/>
+            <a:ext cx="9418320" cy="384048"/>
+          </a:xfrm>
+          <a:prstGeom prst="rect">
+            <a:avLst/>
+          </a:prstGeom>
+          <a:noFill/>
+          <a:ln/>
+        </p:spPr>
+        <p:txBody>
+          <a:bodyPr wrap="square" lIns="0" tIns="0" rIns="0" bIns="0" rtlCol="0" anchor="ctr"/>
+          <a:lstStyle/>
+          <a:p>
+            <a:pPr indent="0" marL="0">
+              <a:lnSpc>
+                <a:spcPts val="1600"/>
+              </a:lnSpc>
+              <a:buNone/>
+            </a:pPr>
+            <a:r>
+              <a:rPr lang="en-US" sz="1300" dirty="0">
+                <a:solidFill>
+                  <a:srgbClr val="5C4F41"/>
+                </a:solidFill>
+              </a:rPr>
+              <a:t>Domínio PDDL com as condições legais e os recursos finitos. Decide as ações e os desvios de reposição.</a:t>
+            </a:r>
+            <a:endParaRPr lang="en-US" sz="1300" dirty="0"/>
+          </a:p>
+        </p:txBody>
+      </p:sp>
+      <p:sp>
+        <p:nvSpPr>
+          <p:cNvPr id="19" name="fecho"/>
+          <p:cNvSpPr/>
+          <p:nvPr/>
+        </p:nvSpPr>
+        <p:spPr>
+          <a:xfrm>
+            <a:off x="685800" y="5120640"/>
+            <a:ext cx="10820095" cy="713232"/>
+          </a:xfrm>
+          <a:prstGeom prst="roundRect">
+            <a:avLst>
+              <a:gd name="adj" fmla="val 11538"/>
+            </a:avLst>
+          </a:prstGeom>
+          <a:solidFill>
+            <a:srgbClr val="DDE7E0"/>
+          </a:solidFill>
+          <a:ln/>
+        </p:spPr>
+      </p:sp>
+      <p:sp>
+        <p:nvSpPr>
+          <p:cNvPr id="20" name="Text 18"/>
+          <p:cNvSpPr txBox="1"/>
+          <p:nvPr/>
+        </p:nvSpPr>
+        <p:spPr>
+          <a:xfrm>
+            <a:off x="960120" y="5193792"/>
+            <a:ext cx="10271455" cy="566928"/>
+          </a:xfrm>
+          <a:prstGeom prst="rect">
+            <a:avLst/>
+          </a:prstGeom>
+          <a:noFill/>
+          <a:ln/>
+        </p:spPr>
+        <p:txBody>
+          <a:bodyPr wrap="square" lIns="0" tIns="0" rIns="0" bIns="0" rtlCol="0" anchor="ctr"/>
+          <a:lstStyle/>
+          <a:p>
+            <a:pPr indent="0" marL="0">
+              <a:lnSpc>
+                <a:spcPts val="1900"/>
+              </a:lnSpc>
+              <a:buNone/>
+            </a:pPr>
+            <a:r>
+              <a:rPr lang="en-US" sz="1550" i="1" dirty="0">
+                <a:solidFill>
+                  <a:srgbClr val="33291F"/>
+                </a:solidFill>
+                <a:latin typeface="Cambria" pitchFamily="34" charset="0"/>
+                <a:ea typeface="Cambria" pitchFamily="34" charset="-122"/>
+                <a:cs typeface="Cambria" pitchFamily="34" charset="-120"/>
+              </a:rPr>
+              <a:t>A camada 3 nunca escolhe a rota: ela só anda pelas arestas que a camada 2 autorizou. Por isso trocar o roteirizador não muda uma linha do domínio.</a:t>
+            </a:r>
+            <a:endParaRPr lang="en-US" sz="1550" dirty="0"/>
           </a:p>
         </p:txBody>
       </p:sp>
@@ -7960,7 +8907,7 @@
                   <a:srgbClr val="B35C38"/>
                 </a:solidFill>
               </a:rPr>
-              <a:t>RESULTADOS ESPERADOS E CRONOGRAMA</a:t>
+              <a:t>PLANO DE VALIDAÇÃO</a:t>
             </a:r>
             <a:endParaRPr lang="en-US" sz="1100" dirty="0"/>
           </a:p>
@@ -8002,7 +8949,7 @@
                 <a:ea typeface="Cambria" pitchFamily="34" charset="-122"/>
                 <a:cs typeface="Cambria" pitchFamily="34" charset="-120"/>
               </a:rPr>
-              <a:t>O que será entregue, e até quando</a:t>
+              <a:t>Construímos o adversário antes de medir</a:t>
             </a:r>
             <a:endParaRPr lang="en-US" sz="3400" dirty="0"/>
           </a:p>
@@ -8010,18 +8957,115 @@
       </p:sp>
       <p:sp>
         <p:nvSpPr>
-          <p:cNvPr id="4" name="entrega"/>
+          <p:cNvPr id="4" name="controle"/>
           <p:cNvSpPr/>
           <p:nvPr/>
         </p:nvSpPr>
         <p:spPr>
           <a:xfrm>
-            <a:off x="685800" y="1783080"/>
-            <a:ext cx="4754880" cy="3108960"/>
+            <a:off x="685800" y="1737360"/>
+            <a:ext cx="10820095" cy="1133856"/>
           </a:xfrm>
           <a:prstGeom prst="roundRect">
             <a:avLst>
-              <a:gd name="adj" fmla="val 2941"/>
+              <a:gd name="adj" fmla="val 7258"/>
+            </a:avLst>
+          </a:prstGeom>
+          <a:solidFill>
+            <a:srgbClr val="DDE7E0"/>
+          </a:solidFill>
+          <a:ln/>
+        </p:spPr>
+      </p:sp>
+      <p:sp>
+        <p:nvSpPr>
+          <p:cNvPr id="5" name="Text 3"/>
+          <p:cNvSpPr txBox="1"/>
+          <p:nvPr/>
+        </p:nvSpPr>
+        <p:spPr>
+          <a:xfrm>
+            <a:off x="978408" y="1865376"/>
+            <a:ext cx="3657600" cy="274320"/>
+          </a:xfrm>
+          <a:prstGeom prst="rect">
+            <a:avLst/>
+          </a:prstGeom>
+          <a:noFill/>
+          <a:ln/>
+        </p:spPr>
+        <p:txBody>
+          <a:bodyPr wrap="square" lIns="0" tIns="0" rIns="0" bIns="0" rtlCol="0" anchor="ctr"/>
+          <a:lstStyle/>
+          <a:p>
+            <a:pPr indent="0" marL="0">
+              <a:buNone/>
+            </a:pPr>
+            <a:r>
+              <a:rPr lang="en-US" sz="1250" b="1" spc="100" kern="0" dirty="0">
+                <a:solidFill>
+                  <a:srgbClr val="4A6B5B"/>
+                </a:solidFill>
+              </a:rPr>
+              <a:t>Grupo de comparação</a:t>
+            </a:r>
+            <a:endParaRPr lang="en-US" sz="1250" dirty="0"/>
+          </a:p>
+        </p:txBody>
+      </p:sp>
+      <p:sp>
+        <p:nvSpPr>
+          <p:cNvPr id="6" name="Text 4"/>
+          <p:cNvSpPr txBox="1"/>
+          <p:nvPr/>
+        </p:nvSpPr>
+        <p:spPr>
+          <a:xfrm>
+            <a:off x="978408" y="2176272"/>
+            <a:ext cx="10234879" cy="621792"/>
+          </a:xfrm>
+          <a:prstGeom prst="rect">
+            <a:avLst/>
+          </a:prstGeom>
+          <a:noFill/>
+          <a:ln/>
+        </p:spPr>
+        <p:txBody>
+          <a:bodyPr wrap="square" lIns="0" tIns="0" rIns="0" bIns="0" rtlCol="0" anchor="ctr"/>
+          <a:lstStyle/>
+          <a:p>
+            <a:pPr indent="0" marL="0">
+              <a:lnSpc>
+                <a:spcPts val="1800"/>
+              </a:lnSpc>
+              <a:buNone/>
+            </a:pPr>
+            <a:r>
+              <a:rPr lang="en-US" sz="1400" dirty="0">
+                <a:solidFill>
+                  <a:srgbClr val="33291F"/>
+                </a:solidFill>
+              </a:rPr>
+              <a:t>Um executor procedural percorre a mesma rota, cumpre os mesmos protocolos e lê a mesma tabela de custos do arquivo PDDL. O que ele não faz é antecipar: só descobre que falta recurso no momento de usá-lo.</a:t>
+            </a:r>
+            <a:endParaRPr lang="en-US" sz="1400" dirty="0"/>
+          </a:p>
+        </p:txBody>
+      </p:sp>
+      <p:sp>
+        <p:nvSpPr>
+          <p:cNvPr id="7" name="exp0"/>
+          <p:cNvSpPr/>
+          <p:nvPr/>
+        </p:nvSpPr>
+        <p:spPr>
+          <a:xfrm>
+            <a:off x="685800" y="3035808"/>
+            <a:ext cx="3448202" cy="1975104"/>
+          </a:xfrm>
+          <a:prstGeom prst="roundRect">
+            <a:avLst>
+              <a:gd name="adj" fmla="val 4630"/>
             </a:avLst>
           </a:prstGeom>
           <a:solidFill>
@@ -8044,14 +9088,14 @@
       </p:sp>
       <p:sp>
         <p:nvSpPr>
-          <p:cNvPr id="5" name="Text 3"/>
-          <p:cNvSpPr txBox="1"/>
-          <p:nvPr/>
-        </p:nvSpPr>
-        <p:spPr>
-          <a:xfrm>
-            <a:off x="923544" y="1984248"/>
-            <a:ext cx="4279392" cy="274320"/>
+          <p:cNvPr id="8" name="Text 6"/>
+          <p:cNvSpPr txBox="1"/>
+          <p:nvPr/>
+        </p:nvSpPr>
+        <p:spPr>
+          <a:xfrm>
+            <a:off x="923544" y="3236976"/>
+            <a:ext cx="2972714" cy="274320"/>
           </a:xfrm>
           <a:prstGeom prst="rect">
             <a:avLst/>
@@ -8069,10 +9113,10 @@
             <a:r>
               <a:rPr lang="en-US" sz="1250" b="1" spc="100" kern="0" dirty="0">
                 <a:solidFill>
-                  <a:srgbClr val="4A6B5B"/>
-                </a:solidFill>
-              </a:rPr>
-              <a:t>NÍVEL DE MATURIDADE TRL 3 A 4</a:t>
+                  <a:srgbClr val="8A7A67"/>
+                </a:solidFill>
+              </a:rPr>
+              <a:t>EXPERIMENTO 1</a:t>
             </a:r>
             <a:endParaRPr lang="en-US" sz="1250" dirty="0"/>
           </a:p>
@@ -8080,14 +9124,14 @@
       </p:sp>
       <p:sp>
         <p:nvSpPr>
-          <p:cNvPr id="6" name="Text 4"/>
-          <p:cNvSpPr txBox="1"/>
-          <p:nvPr/>
-        </p:nvSpPr>
-        <p:spPr>
-          <a:xfrm>
-            <a:off x="923544" y="2313432"/>
-            <a:ext cx="4279392" cy="384048"/>
+          <p:cNvPr id="9" name="Text 7"/>
+          <p:cNvSpPr txBox="1"/>
+          <p:nvPr/>
+        </p:nvSpPr>
+        <p:spPr>
+          <a:xfrm>
+            <a:off x="923544" y="3566160"/>
+            <a:ext cx="2972714" cy="365760"/>
           </a:xfrm>
           <a:prstGeom prst="rect">
             <a:avLst/>
@@ -8106,7 +9150,7 @@
               <a:buNone/>
             </a:pPr>
             <a:r>
-              <a:rPr lang="en-US" sz="1700" b="1" dirty="0">
+              <a:rPr lang="en-US" sz="1500" b="1" dirty="0">
                 <a:solidFill>
                   <a:srgbClr val="33291F"/>
                 </a:solidFill>
@@ -8114,22 +9158,22 @@
                 <a:ea typeface="Cambria" pitchFamily="34" charset="-122"/>
                 <a:cs typeface="Cambria" pitchFamily="34" charset="-120"/>
               </a:rPr>
-              <a:t>Sistema validado em laboratório</a:t>
-            </a:r>
-            <a:endParaRPr lang="en-US" sz="1700" dirty="0"/>
-          </a:p>
-        </p:txBody>
-      </p:sp>
-      <p:sp>
-        <p:nvSpPr>
-          <p:cNvPr id="7" name="Text 5"/>
-          <p:cNvSpPr txBox="1"/>
-          <p:nvPr/>
-        </p:nvSpPr>
-        <p:spPr>
-          <a:xfrm>
-            <a:off x="923544" y="2770632"/>
-            <a:ext cx="4279392" cy="1956816"/>
+              <a:t>Escalabilidade</a:t>
+            </a:r>
+            <a:endParaRPr lang="en-US" sz="1500" dirty="0"/>
+          </a:p>
+        </p:txBody>
+      </p:sp>
+      <p:sp>
+        <p:nvSpPr>
+          <p:cNvPr id="10" name="Text 8"/>
+          <p:cNvSpPr txBox="1"/>
+          <p:nvPr/>
+        </p:nvSpPr>
+        <p:spPr>
+          <a:xfrm>
+            <a:off x="923544" y="4005072"/>
+            <a:ext cx="2972714" cy="841248"/>
           </a:xfrm>
           <a:prstGeom prst="rect">
             <a:avLst/>
@@ -8143,281 +9187,36 @@
           <a:p>
             <a:pPr indent="0" marL="0">
               <a:lnSpc>
-                <a:spcPts val="1800"/>
-              </a:lnSpc>
-              <a:buNone/>
-            </a:pPr>
-            <a:r>
-              <a:rPr lang="en-US" sz="1300" dirty="0">
+                <a:spcPts val="1550"/>
+              </a:lnSpc>
+              <a:buNone/>
+            </a:pPr>
+            <a:r>
+              <a:rPr lang="en-US" sz="1250" dirty="0">
                 <a:solidFill>
                   <a:srgbClr val="5C4F41"/>
                 </a:solidFill>
               </a:rPr>
-              <a:t>Não é produto pronto para implantação em rede de saúde.</a:t>
-            </a:r>
-            <a:endParaRPr lang="en-US" sz="1300" dirty="0"/>
-          </a:p>
-          <a:p>
-            <a:pPr indent="0" marL="0">
-              <a:lnSpc>
-                <a:spcPts val="1800"/>
-              </a:lnSpc>
-              <a:buNone/>
-            </a:pPr>
-            <a:endParaRPr lang="en-US" sz="1300" dirty="0"/>
-          </a:p>
-          <a:p>
-            <a:pPr indent="0" marL="0">
-              <a:lnSpc>
-                <a:spcPts val="1800"/>
-              </a:lnSpc>
-              <a:buNone/>
-            </a:pPr>
-            <a:r>
-              <a:rPr lang="en-US" sz="1300" dirty="0">
-                <a:solidFill>
-                  <a:srgbClr val="5C4F41"/>
-                </a:solidFill>
-              </a:rPr>
-              <a:t>·  o sistema com as camadas integradas</a:t>
-            </a:r>
-            <a:endParaRPr lang="en-US" sz="1300" dirty="0"/>
-          </a:p>
-          <a:p>
-            <a:pPr indent="0" marL="0">
-              <a:lnSpc>
-                <a:spcPts val="1800"/>
-              </a:lnSpc>
-              <a:buNone/>
-            </a:pPr>
-            <a:r>
-              <a:rPr lang="en-US" sz="1300" dirty="0">
-                <a:solidFill>
-                  <a:srgbClr val="5C4F41"/>
-                </a:solidFill>
-              </a:rPr>
-              <a:t>·  o domínio PDDL mapeado dispositivo a dispositivo</a:t>
-            </a:r>
-            <a:endParaRPr lang="en-US" sz="1300" dirty="0"/>
-          </a:p>
-          <a:p>
-            <a:pPr indent="0" marL="0">
-              <a:lnSpc>
-                <a:spcPts val="1800"/>
-              </a:lnSpc>
-              <a:buNone/>
-            </a:pPr>
-            <a:r>
-              <a:rPr lang="en-US" sz="1300" dirty="0">
-                <a:solidFill>
-                  <a:srgbClr val="5C4F41"/>
-                </a:solidFill>
-              </a:rPr>
-              <a:t>·  a saída legível pelo agente de saúde</a:t>
-            </a:r>
-            <a:endParaRPr lang="en-US" sz="1300" dirty="0"/>
-          </a:p>
-          <a:p>
-            <a:pPr indent="0" marL="0">
-              <a:lnSpc>
-                <a:spcPts val="1800"/>
-              </a:lnSpc>
-              <a:buNone/>
-            </a:pPr>
-            <a:r>
-              <a:rPr lang="en-US" sz="1300" dirty="0">
-                <a:solidFill>
-                  <a:srgbClr val="5C4F41"/>
-                </a:solidFill>
-              </a:rPr>
-              <a:t>·  os experimentos reprodutíveis</a:t>
-            </a:r>
-            <a:endParaRPr lang="en-US" sz="1300" dirty="0"/>
-          </a:p>
-          <a:p>
-            <a:pPr indent="0" marL="0">
-              <a:lnSpc>
-                <a:spcPts val="1800"/>
-              </a:lnSpc>
-              <a:buNone/>
-            </a:pPr>
-            <a:r>
-              <a:rPr lang="en-US" sz="1300" dirty="0">
-                <a:solidFill>
-                  <a:srgbClr val="5C4F41"/>
-                </a:solidFill>
-              </a:rPr>
-              <a:t>·  o relatório técnico das medições</a:t>
-            </a:r>
-            <a:endParaRPr lang="en-US" sz="1300" dirty="0"/>
-          </a:p>
-        </p:txBody>
-      </p:sp>
-      <p:sp>
-        <p:nvSpPr>
-          <p:cNvPr id="8" name="marco0"/>
+              <a:t>Até que tamanho de microárea cada estratégia de busca ainda é viável.</a:t>
+            </a:r>
+            <a:endParaRPr lang="en-US" sz="1250" dirty="0"/>
+          </a:p>
+        </p:txBody>
+      </p:sp>
+      <p:sp>
+        <p:nvSpPr>
+          <p:cNvPr id="11" name="exp1"/>
           <p:cNvSpPr/>
           <p:nvPr/>
         </p:nvSpPr>
         <p:spPr>
           <a:xfrm>
-            <a:off x="5678424" y="1783080"/>
-            <a:ext cx="5827471" cy="969264"/>
+            <a:off x="4371746" y="3035808"/>
+            <a:ext cx="3448202" cy="1975104"/>
           </a:xfrm>
           <a:prstGeom prst="roundRect">
             <a:avLst>
-              <a:gd name="adj" fmla="val 7547"/>
-            </a:avLst>
-          </a:prstGeom>
-          <a:solidFill>
-            <a:srgbClr val="DDE7E0"/>
-          </a:solidFill>
-          <a:ln w="9525">
-            <a:solidFill>
-              <a:srgbClr val="E6DCCB"/>
-            </a:solidFill>
-            <a:prstDash val="solid"/>
-          </a:ln>
-          <a:effectLst>
-            <a:outerShdw sx="100000" sy="100000" kx="0" ky="0" algn="bl" rotWithShape="0" blurRad="127000" dist="25400" dir="5400000">
-              <a:srgbClr val="33291F">
-                <a:alpha val="10000"/>
-              </a:srgbClr>
-            </a:outerShdw>
-          </a:effectLst>
-        </p:spPr>
-      </p:sp>
-      <p:sp>
-        <p:nvSpPr>
-          <p:cNvPr id="9" name="Text 7"/>
-          <p:cNvSpPr txBox="1"/>
-          <p:nvPr/>
-        </p:nvSpPr>
-        <p:spPr>
-          <a:xfrm>
-            <a:off x="5916168" y="1947672"/>
-            <a:ext cx="1143000" cy="292608"/>
-          </a:xfrm>
-          <a:prstGeom prst="rect">
-            <a:avLst/>
-          </a:prstGeom>
-          <a:noFill/>
-          <a:ln/>
-        </p:spPr>
-        <p:txBody>
-          <a:bodyPr wrap="square" lIns="0" tIns="0" rIns="0" bIns="0" rtlCol="0" anchor="ctr"/>
-          <a:lstStyle/>
-          <a:p>
-            <a:pPr indent="0" marL="0">
-              <a:buNone/>
-            </a:pPr>
-            <a:r>
-              <a:rPr lang="en-US" sz="1450" b="1" dirty="0">
-                <a:solidFill>
-                  <a:srgbClr val="4A6B5B"/>
-                </a:solidFill>
-                <a:latin typeface="Cambria" pitchFamily="34" charset="0"/>
-                <a:ea typeface="Cambria" pitchFamily="34" charset="-122"/>
-                <a:cs typeface="Cambria" pitchFamily="34" charset="-120"/>
-              </a:rPr>
-              <a:t>25 / 09</a:t>
-            </a:r>
-            <a:endParaRPr lang="en-US" sz="1450" dirty="0"/>
-          </a:p>
-        </p:txBody>
-      </p:sp>
-      <p:sp>
-        <p:nvSpPr>
-          <p:cNvPr id="10" name="Text 8"/>
-          <p:cNvSpPr txBox="1"/>
-          <p:nvPr/>
-        </p:nvSpPr>
-        <p:spPr>
-          <a:xfrm>
-            <a:off x="7132320" y="1929384"/>
-            <a:ext cx="4572000" cy="310896"/>
-          </a:xfrm>
-          <a:prstGeom prst="rect">
-            <a:avLst/>
-          </a:prstGeom>
-          <a:noFill/>
-          <a:ln/>
-        </p:spPr>
-        <p:txBody>
-          <a:bodyPr wrap="square" lIns="0" tIns="0" rIns="0" bIns="0" rtlCol="0" anchor="ctr"/>
-          <a:lstStyle/>
-          <a:p>
-            <a:pPr indent="0" marL="0">
-              <a:buNone/>
-            </a:pPr>
-            <a:r>
-              <a:rPr lang="en-US" sz="1450" b="1" dirty="0">
-                <a:solidFill>
-                  <a:srgbClr val="33291F"/>
-                </a:solidFill>
-                <a:latin typeface="Cambria" pitchFamily="34" charset="0"/>
-                <a:ea typeface="Cambria" pitchFamily="34" charset="-122"/>
-                <a:cs typeface="Cambria" pitchFamily="34" charset="-120"/>
-              </a:rPr>
-              <a:t>Concepção e verificação de viabilidade</a:t>
-            </a:r>
-            <a:endParaRPr lang="en-US" sz="1450" dirty="0"/>
-          </a:p>
-        </p:txBody>
-      </p:sp>
-      <p:sp>
-        <p:nvSpPr>
-          <p:cNvPr id="11" name="Text 9"/>
-          <p:cNvSpPr txBox="1"/>
-          <p:nvPr/>
-        </p:nvSpPr>
-        <p:spPr>
-          <a:xfrm>
-            <a:off x="7132320" y="2276856"/>
-            <a:ext cx="4572000" cy="402336"/>
-          </a:xfrm>
-          <a:prstGeom prst="rect">
-            <a:avLst/>
-          </a:prstGeom>
-          <a:noFill/>
-          <a:ln/>
-        </p:spPr>
-        <p:txBody>
-          <a:bodyPr wrap="square" lIns="0" tIns="0" rIns="0" bIns="0" rtlCol="0" anchor="ctr"/>
-          <a:lstStyle/>
-          <a:p>
-            <a:pPr indent="0" marL="0">
-              <a:lnSpc>
-                <a:spcPts val="1450"/>
-              </a:lnSpc>
-              <a:buNone/>
-            </a:pPr>
-            <a:r>
-              <a:rPr lang="en-US" sz="1200" dirty="0">
-                <a:solidFill>
-                  <a:srgbClr val="5C4F41"/>
-                </a:solidFill>
-              </a:rPr>
-              <a:t>Delimitação do problema, revisão bibliográfica e implementação exploratória.</a:t>
-            </a:r>
-            <a:endParaRPr lang="en-US" sz="1200" dirty="0"/>
-          </a:p>
-        </p:txBody>
-      </p:sp>
-      <p:sp>
-        <p:nvSpPr>
-          <p:cNvPr id="12" name="marco1"/>
-          <p:cNvSpPr/>
-          <p:nvPr/>
-        </p:nvSpPr>
-        <p:spPr>
-          <a:xfrm>
-            <a:off x="5678424" y="2852928"/>
-            <a:ext cx="5827471" cy="969264"/>
-          </a:xfrm>
-          <a:prstGeom prst="roundRect">
-            <a:avLst>
-              <a:gd name="adj" fmla="val 7547"/>
+              <a:gd name="adj" fmla="val 4630"/>
             </a:avLst>
           </a:prstGeom>
           <a:solidFill>
@@ -8440,14 +9239,50 @@
       </p:sp>
       <p:sp>
         <p:nvSpPr>
+          <p:cNvPr id="12" name="Text 10"/>
+          <p:cNvSpPr txBox="1"/>
+          <p:nvPr/>
+        </p:nvSpPr>
+        <p:spPr>
+          <a:xfrm>
+            <a:off x="4609490" y="3236976"/>
+            <a:ext cx="2972714" cy="274320"/>
+          </a:xfrm>
+          <a:prstGeom prst="rect">
+            <a:avLst/>
+          </a:prstGeom>
+          <a:noFill/>
+          <a:ln/>
+        </p:spPr>
+        <p:txBody>
+          <a:bodyPr wrap="square" lIns="0" tIns="0" rIns="0" bIns="0" rtlCol="0" anchor="ctr"/>
+          <a:lstStyle/>
+          <a:p>
+            <a:pPr indent="0" marL="0">
+              <a:buNone/>
+            </a:pPr>
+            <a:r>
+              <a:rPr lang="en-US" sz="1250" b="1" spc="100" kern="0" dirty="0">
+                <a:solidFill>
+                  <a:srgbClr val="8A7A67"/>
+                </a:solidFill>
+              </a:rPr>
+              <a:t>EXPERIMENTO 2</a:t>
+            </a:r>
+            <a:endParaRPr lang="en-US" sz="1250" dirty="0"/>
+          </a:p>
+        </p:txBody>
+      </p:sp>
+      <p:sp>
+        <p:nvSpPr>
           <p:cNvPr id="13" name="Text 11"/>
           <p:cNvSpPr txBox="1"/>
           <p:nvPr/>
         </p:nvSpPr>
         <p:spPr>
           <a:xfrm>
-            <a:off x="5916168" y="3017520"/>
-            <a:ext cx="1143000" cy="292608"/>
+            <a:off x="4609490" y="3566160"/>
+            <a:ext cx="2972714" cy="365760"/>
           </a:xfrm>
           <a:prstGeom prst="rect">
             <a:avLst/>
@@ -8460,20 +9295,23 @@
           <a:lstStyle/>
           <a:p>
             <a:pPr indent="0" marL="0">
-              <a:buNone/>
-            </a:pPr>
-            <a:r>
-              <a:rPr lang="en-US" sz="1450" b="1" dirty="0">
-                <a:solidFill>
-                  <a:srgbClr val="B35C38"/>
+              <a:lnSpc>
+                <a:spcPts val="2100"/>
+              </a:lnSpc>
+              <a:buNone/>
+            </a:pPr>
+            <a:r>
+              <a:rPr lang="en-US" sz="1500" b="1" dirty="0">
+                <a:solidFill>
+                  <a:srgbClr val="33291F"/>
                 </a:solidFill>
                 <a:latin typeface="Cambria" pitchFamily="34" charset="0"/>
                 <a:ea typeface="Cambria" pitchFamily="34" charset="-122"/>
                 <a:cs typeface="Cambria" pitchFamily="34" charset="-120"/>
               </a:rPr>
-              <a:t>02 / 10</a:t>
-            </a:r>
-            <a:endParaRPr lang="en-US" sz="1450" dirty="0"/>
+              <a:t>Falsos negativos</a:t>
+            </a:r>
+            <a:endParaRPr lang="en-US" sz="1500" dirty="0"/>
           </a:p>
         </p:txBody>
       </p:sp>
@@ -8485,90 +9323,51 @@
         </p:nvSpPr>
         <p:spPr>
           <a:xfrm>
-            <a:off x="7132320" y="2999232"/>
-            <a:ext cx="4572000" cy="310896"/>
-          </a:xfrm>
-          <a:prstGeom prst="rect">
-            <a:avLst/>
-          </a:prstGeom>
-          <a:noFill/>
-          <a:ln/>
-        </p:spPr>
-        <p:txBody>
-          <a:bodyPr wrap="square" lIns="0" tIns="0" rIns="0" bIns="0" rtlCol="0" anchor="ctr"/>
-          <a:lstStyle/>
-          <a:p>
-            <a:pPr indent="0" marL="0">
-              <a:buNone/>
-            </a:pPr>
-            <a:r>
-              <a:rPr lang="en-US" sz="1450" b="1" dirty="0">
-                <a:solidFill>
-                  <a:srgbClr val="33291F"/>
-                </a:solidFill>
-                <a:latin typeface="Cambria" pitchFamily="34" charset="0"/>
-                <a:ea typeface="Cambria" pitchFamily="34" charset="-122"/>
-                <a:cs typeface="Cambria" pitchFamily="34" charset="-120"/>
-              </a:rPr>
-              <a:t>Construção do sistema</a:t>
-            </a:r>
-            <a:endParaRPr lang="en-US" sz="1450" dirty="0"/>
-          </a:p>
-        </p:txBody>
-      </p:sp>
-      <p:sp>
-        <p:nvSpPr>
-          <p:cNvPr id="15" name="Text 13"/>
-          <p:cNvSpPr txBox="1"/>
-          <p:nvPr/>
-        </p:nvSpPr>
-        <p:spPr>
-          <a:xfrm>
-            <a:off x="7132320" y="3346704"/>
-            <a:ext cx="4572000" cy="402336"/>
-          </a:xfrm>
-          <a:prstGeom prst="rect">
-            <a:avLst/>
-          </a:prstGeom>
-          <a:noFill/>
-          <a:ln/>
-        </p:spPr>
-        <p:txBody>
-          <a:bodyPr wrap="square" lIns="0" tIns="0" rIns="0" bIns="0" rtlCol="0" anchor="ctr"/>
-          <a:lstStyle/>
-          <a:p>
-            <a:pPr indent="0" marL="0">
-              <a:lnSpc>
-                <a:spcPts val="1450"/>
-              </a:lnSpc>
-              <a:buNone/>
-            </a:pPr>
-            <a:r>
-              <a:rPr lang="en-US" sz="1200" dirty="0">
+            <a:off x="4609490" y="4005072"/>
+            <a:ext cx="2972714" cy="841248"/>
+          </a:xfrm>
+          <a:prstGeom prst="rect">
+            <a:avLst/>
+          </a:prstGeom>
+          <a:noFill/>
+          <a:ln/>
+        </p:spPr>
+        <p:txBody>
+          <a:bodyPr wrap="square" lIns="0" tIns="0" rIns="0" bIns="0" rtlCol="0" anchor="t"/>
+          <a:lstStyle/>
+          <a:p>
+            <a:pPr indent="0" marL="0">
+              <a:lnSpc>
+                <a:spcPts val="1550"/>
+              </a:lnSpc>
+              <a:buNone/>
+            </a:pPr>
+            <a:r>
+              <a:rPr lang="en-US" sz="1250" dirty="0">
                 <a:solidFill>
                   <a:srgbClr val="5C4F41"/>
                 </a:solidFill>
               </a:rPr>
-              <a:t>Domínio completo, camada geométrica, política de seleção, saída operacional e experimentos.</a:t>
-            </a:r>
-            <a:endParaRPr lang="en-US" sz="1200" dirty="0"/>
-          </a:p>
-        </p:txBody>
-      </p:sp>
-      <p:sp>
-        <p:nvSpPr>
-          <p:cNvPr id="16" name="marco2"/>
+              <a:t>Com que frequência cada abordagem declara inexequível um turno que tem solução.</a:t>
+            </a:r>
+            <a:endParaRPr lang="en-US" sz="1250" dirty="0"/>
+          </a:p>
+        </p:txBody>
+      </p:sp>
+      <p:sp>
+        <p:nvSpPr>
+          <p:cNvPr id="15" name="exp2"/>
           <p:cNvSpPr/>
           <p:nvPr/>
         </p:nvSpPr>
         <p:spPr>
           <a:xfrm>
-            <a:off x="5678424" y="3922776"/>
-            <a:ext cx="5827471" cy="969264"/>
+            <a:off x="8057693" y="3035808"/>
+            <a:ext cx="3448202" cy="1975104"/>
           </a:xfrm>
           <a:prstGeom prst="roundRect">
             <a:avLst>
-              <a:gd name="adj" fmla="val 7547"/>
+              <a:gd name="adj" fmla="val 4630"/>
             </a:avLst>
           </a:prstGeom>
           <a:solidFill>
@@ -8591,14 +9390,50 @@
       </p:sp>
       <p:sp>
         <p:nvSpPr>
+          <p:cNvPr id="16" name="Text 14"/>
+          <p:cNvSpPr txBox="1"/>
+          <p:nvPr/>
+        </p:nvSpPr>
+        <p:spPr>
+          <a:xfrm>
+            <a:off x="8295437" y="3236976"/>
+            <a:ext cx="2972714" cy="274320"/>
+          </a:xfrm>
+          <a:prstGeom prst="rect">
+            <a:avLst/>
+          </a:prstGeom>
+          <a:noFill/>
+          <a:ln/>
+        </p:spPr>
+        <p:txBody>
+          <a:bodyPr wrap="square" lIns="0" tIns="0" rIns="0" bIns="0" rtlCol="0" anchor="ctr"/>
+          <a:lstStyle/>
+          <a:p>
+            <a:pPr indent="0" marL="0">
+              <a:buNone/>
+            </a:pPr>
+            <a:r>
+              <a:rPr lang="en-US" sz="1250" b="1" spc="100" kern="0" dirty="0">
+                <a:solidFill>
+                  <a:srgbClr val="8A7A67"/>
+                </a:solidFill>
+              </a:rPr>
+              <a:t>EXPERIMENTO 3</a:t>
+            </a:r>
+            <a:endParaRPr lang="en-US" sz="1250" dirty="0"/>
+          </a:p>
+        </p:txBody>
+      </p:sp>
+      <p:sp>
+        <p:nvSpPr>
           <p:cNvPr id="17" name="Text 15"/>
           <p:cNvSpPr txBox="1"/>
           <p:nvPr/>
         </p:nvSpPr>
         <p:spPr>
           <a:xfrm>
-            <a:off x="5916168" y="4087368"/>
-            <a:ext cx="1143000" cy="292608"/>
+            <a:off x="8295437" y="3566160"/>
+            <a:ext cx="2972714" cy="365760"/>
           </a:xfrm>
           <a:prstGeom prst="rect">
             <a:avLst/>
@@ -8611,20 +9446,23 @@
           <a:lstStyle/>
           <a:p>
             <a:pPr indent="0" marL="0">
-              <a:buNone/>
-            </a:pPr>
-            <a:r>
-              <a:rPr lang="en-US" sz="1450" b="1" dirty="0">
-                <a:solidFill>
-                  <a:srgbClr val="B35C38"/>
+              <a:lnSpc>
+                <a:spcPts val="2100"/>
+              </a:lnSpc>
+              <a:buNone/>
+            </a:pPr>
+            <a:r>
+              <a:rPr lang="en-US" sz="1500" b="1" dirty="0">
+                <a:solidFill>
+                  <a:srgbClr val="33291F"/>
                 </a:solidFill>
                 <a:latin typeface="Cambria" pitchFamily="34" charset="0"/>
                 <a:ea typeface="Cambria" pitchFamily="34" charset="-122"/>
                 <a:cs typeface="Cambria" pitchFamily="34" charset="-120"/>
               </a:rPr>
-              <a:t>09 / 10</a:t>
-            </a:r>
-            <a:endParaRPr lang="en-US" sz="1450" dirty="0"/>
+              <a:t>Prova de inviabilidade</a:t>
+            </a:r>
+            <a:endParaRPr lang="en-US" sz="1500" dirty="0"/>
           </a:p>
         </p:txBody>
       </p:sp>
@@ -8636,8 +9474,47 @@
         </p:nvSpPr>
         <p:spPr>
           <a:xfrm>
-            <a:off x="7132320" y="4069080"/>
-            <a:ext cx="4572000" cy="310896"/>
+            <a:off x="8295437" y="4005072"/>
+            <a:ext cx="2972714" cy="841248"/>
+          </a:xfrm>
+          <a:prstGeom prst="rect">
+            <a:avLst/>
+          </a:prstGeom>
+          <a:noFill/>
+          <a:ln/>
+        </p:spPr>
+        <p:txBody>
+          <a:bodyPr wrap="square" lIns="0" tIns="0" rIns="0" bIns="0" rtlCol="0" anchor="t"/>
+          <a:lstStyle/>
+          <a:p>
+            <a:pPr indent="0" marL="0">
+              <a:lnSpc>
+                <a:spcPts val="1550"/>
+              </a:lnSpc>
+              <a:buNone/>
+            </a:pPr>
+            <a:r>
+              <a:rPr lang="en-US" sz="1250" dirty="0">
+                <a:solidFill>
+                  <a:srgbClr val="5C4F41"/>
+                </a:solidFill>
+              </a:rPr>
+              <a:t>Instâncias sem solução, de dois tipos: falta condição legal, ou falta recurso.</a:t>
+            </a:r>
+            <a:endParaRPr lang="en-US" sz="1250" dirty="0"/>
+          </a:p>
+        </p:txBody>
+      </p:sp>
+      <p:sp>
+        <p:nvSpPr>
+          <p:cNvPr id="19" name="Text 17"/>
+          <p:cNvSpPr txBox="1"/>
+          <p:nvPr/>
+        </p:nvSpPr>
+        <p:spPr>
+          <a:xfrm>
+            <a:off x="685800" y="5138928"/>
+            <a:ext cx="10820095" cy="548640"/>
           </a:xfrm>
           <a:prstGeom prst="rect">
             <a:avLst/>
@@ -8650,10 +9527,13 @@
           <a:lstStyle/>
           <a:p>
             <a:pPr indent="0" marL="0">
-              <a:buNone/>
-            </a:pPr>
-            <a:r>
-              <a:rPr lang="en-US" sz="1450" b="1" dirty="0">
+              <a:lnSpc>
+                <a:spcPts val="2100"/>
+              </a:lnSpc>
+              <a:buNone/>
+            </a:pPr>
+            <a:r>
+              <a:rPr lang="en-US" sz="1700" b="1" dirty="0">
                 <a:solidFill>
                   <a:srgbClr val="33291F"/>
                 </a:solidFill>
@@ -8661,88 +9541,7 @@
                 <a:ea typeface="Cambria" pitchFamily="34" charset="-122"/>
                 <a:cs typeface="Cambria" pitchFamily="34" charset="-120"/>
               </a:rPr>
-              <a:t>Consolidação</a:t>
-            </a:r>
-            <a:endParaRPr lang="en-US" sz="1450" dirty="0"/>
-          </a:p>
-        </p:txBody>
-      </p:sp>
-      <p:sp>
-        <p:nvSpPr>
-          <p:cNvPr id="19" name="Text 17"/>
-          <p:cNvSpPr txBox="1"/>
-          <p:nvPr/>
-        </p:nvSpPr>
-        <p:spPr>
-          <a:xfrm>
-            <a:off x="7132320" y="4416552"/>
-            <a:ext cx="4572000" cy="402336"/>
-          </a:xfrm>
-          <a:prstGeom prst="rect">
-            <a:avLst/>
-          </a:prstGeom>
-          <a:noFill/>
-          <a:ln/>
-        </p:spPr>
-        <p:txBody>
-          <a:bodyPr wrap="square" lIns="0" tIns="0" rIns="0" bIns="0" rtlCol="0" anchor="ctr"/>
-          <a:lstStyle/>
-          <a:p>
-            <a:pPr indent="0" marL="0">
-              <a:lnSpc>
-                <a:spcPts val="1450"/>
-              </a:lnSpc>
-              <a:buNone/>
-            </a:pPr>
-            <a:r>
-              <a:rPr lang="en-US" sz="1200" dirty="0">
-                <a:solidFill>
-                  <a:srgbClr val="5C4F41"/>
-                </a:solidFill>
-              </a:rPr>
-              <a:t>Análise crítica, relatório final e apresentação.</a:t>
-            </a:r>
-            <a:endParaRPr lang="en-US" sz="1200" dirty="0"/>
-          </a:p>
-        </p:txBody>
-      </p:sp>
-      <p:sp>
-        <p:nvSpPr>
-          <p:cNvPr id="20" name="Text 18"/>
-          <p:cNvSpPr txBox="1"/>
-          <p:nvPr/>
-        </p:nvSpPr>
-        <p:spPr>
-          <a:xfrm>
-            <a:off x="685800" y="5138928"/>
-            <a:ext cx="10820095" cy="548640"/>
-          </a:xfrm>
-          <a:prstGeom prst="rect">
-            <a:avLst/>
-          </a:prstGeom>
-          <a:noFill/>
-          <a:ln/>
-        </p:spPr>
-        <p:txBody>
-          <a:bodyPr wrap="square" lIns="0" tIns="0" rIns="0" bIns="0" rtlCol="0" anchor="ctr"/>
-          <a:lstStyle/>
-          <a:p>
-            <a:pPr indent="0" marL="0">
-              <a:lnSpc>
-                <a:spcPts val="2100"/>
-              </a:lnSpc>
-              <a:buNone/>
-            </a:pPr>
-            <a:r>
-              <a:rPr lang="en-US" sz="1700" b="1" dirty="0">
-                <a:solidFill>
-                  <a:srgbClr val="33291F"/>
-                </a:solidFill>
-                <a:latin typeface="Cambria" pitchFamily="34" charset="0"/>
-                <a:ea typeface="Cambria" pitchFamily="34" charset="-122"/>
-                <a:cs typeface="Cambria" pitchFamily="34" charset="-120"/>
-              </a:rPr>
-              <a:t>O desfecho contrário à hipótese também é resultado: delimitaria as condições em que o paradigma compensa.</a:t>
+              <a:t>A variável isolada é uma só: a capacidade de antecipar conflitos de recursos.</a:t>
             </a:r>
             <a:endParaRPr lang="en-US" sz="1700" dirty="0"/>
           </a:p>
